--- a/public/lessons/year-6-maths/autumn/week-1/read-and-write-numbers-to-ten-million/teaching-powerpoint-v1.pptx
+++ b/public/lessons/year-6-maths/autumn/week-1/read-and-write-numbers-to-ten-million/teaching-powerpoint-v1.pptx
@@ -2,24 +2,24 @@
 <file path=ppt/presentation.xml><?xml version="1.0" encoding="utf-8"?>
 <p:presentation xmlns:p="http://schemas.openxmlformats.org/presentationml/2006/main">
   <p:sldMasterIdLst>
-    <p:sldMasterId xmlns:r="http://schemas.openxmlformats.org/officeDocument/2006/relationships" id="2147483648" r:id="R1972e4b9c52745f1"/>
+    <p:sldMasterId xmlns:r="http://schemas.openxmlformats.org/officeDocument/2006/relationships" id="2147483648" r:id="Ref600d507b474021"/>
   </p:sldMasterIdLst>
   <p:notesMasterIdLst>
-    <p:notesMasterId xmlns:r="http://schemas.openxmlformats.org/officeDocument/2006/relationships" r:id="Rdce8e3ba34af4937"/>
+    <p:notesMasterId xmlns:r="http://schemas.openxmlformats.org/officeDocument/2006/relationships" r:id="Rf43edf4fdd704bc3"/>
   </p:notesMasterIdLst>
   <p:sldIdLst>
-    <p:sldId xmlns:r="http://schemas.openxmlformats.org/officeDocument/2006/relationships" id="256" r:id="Ree767a92abb64f1a"/>
-    <p:sldId xmlns:r="http://schemas.openxmlformats.org/officeDocument/2006/relationships" id="257" r:id="R1230b5eb6c1f4289"/>
-    <p:sldId xmlns:r="http://schemas.openxmlformats.org/officeDocument/2006/relationships" id="258" r:id="R925176dc1cf94977"/>
-    <p:sldId xmlns:r="http://schemas.openxmlformats.org/officeDocument/2006/relationships" id="259" r:id="R11a0f2002ef1472a"/>
-    <p:sldId xmlns:r="http://schemas.openxmlformats.org/officeDocument/2006/relationships" id="260" r:id="R26c39032d75e45c1"/>
-    <p:sldId xmlns:r="http://schemas.openxmlformats.org/officeDocument/2006/relationships" id="261" r:id="R289fd61a6e7d4721"/>
-    <p:sldId xmlns:r="http://schemas.openxmlformats.org/officeDocument/2006/relationships" id="262" r:id="R3d3fa0ac23764256"/>
-    <p:sldId xmlns:r="http://schemas.openxmlformats.org/officeDocument/2006/relationships" id="263" r:id="R741ac27d9b154585"/>
-    <p:sldId xmlns:r="http://schemas.openxmlformats.org/officeDocument/2006/relationships" id="264" r:id="R4afe8901917647b7"/>
-    <p:sldId xmlns:r="http://schemas.openxmlformats.org/officeDocument/2006/relationships" id="265" r:id="Re504fe8aee4644ea"/>
-    <p:sldId xmlns:r="http://schemas.openxmlformats.org/officeDocument/2006/relationships" id="266" r:id="Rbb5f04a32f3a4326"/>
-    <p:sldId xmlns:r="http://schemas.openxmlformats.org/officeDocument/2006/relationships" id="267" r:id="R2ac32fb1954140f2"/>
+    <p:sldId xmlns:r="http://schemas.openxmlformats.org/officeDocument/2006/relationships" id="256" r:id="Rb633820ef92e436c"/>
+    <p:sldId xmlns:r="http://schemas.openxmlformats.org/officeDocument/2006/relationships" id="257" r:id="R90229101c3454ca9"/>
+    <p:sldId xmlns:r="http://schemas.openxmlformats.org/officeDocument/2006/relationships" id="258" r:id="R6025b7c640094092"/>
+    <p:sldId xmlns:r="http://schemas.openxmlformats.org/officeDocument/2006/relationships" id="259" r:id="R189dbbb836654264"/>
+    <p:sldId xmlns:r="http://schemas.openxmlformats.org/officeDocument/2006/relationships" id="260" r:id="Re59ddbaf61f84777"/>
+    <p:sldId xmlns:r="http://schemas.openxmlformats.org/officeDocument/2006/relationships" id="261" r:id="Rb3cf85be90a443c6"/>
+    <p:sldId xmlns:r="http://schemas.openxmlformats.org/officeDocument/2006/relationships" id="262" r:id="R3f0b77a2964e4a2c"/>
+    <p:sldId xmlns:r="http://schemas.openxmlformats.org/officeDocument/2006/relationships" id="263" r:id="Rbe9d8c0b75ca4a92"/>
+    <p:sldId xmlns:r="http://schemas.openxmlformats.org/officeDocument/2006/relationships" id="264" r:id="Rc13912d06bcb42c5"/>
+    <p:sldId xmlns:r="http://schemas.openxmlformats.org/officeDocument/2006/relationships" id="265" r:id="R01627e055619456d"/>
+    <p:sldId xmlns:r="http://schemas.openxmlformats.org/officeDocument/2006/relationships" id="266" r:id="R81c6f3f3a8f54691"/>
+    <p:sldId xmlns:r="http://schemas.openxmlformats.org/officeDocument/2006/relationships" id="267" r:id="Rb3ecc421316c4d85"/>
   </p:sldIdLst>
   <p:sldSz cx="12192000" cy="6858000"/>
   <p:notesSz cx="6858000" cy="9144000"/>
@@ -873,7 +873,7 @@
           <a:lstStyle xmlns:a="http://schemas.openxmlformats.org/drawingml/2006/main"/>
           <a:p xmlns:a="http://schemas.openxmlformats.org/drawingml/2006/main">
             <a:r>
-              <a:t>I do. Reveal the question, setup and each calculation stage one click at a time. Pupils watch before copying. Model answer: Six million, four hundred and seven thousand, two hundred and fifteen.</a:t>
+              <a:t>I do. Reveal the question, then reveal each mathematical change one click at a time. Point to the numbers and operation that changed before moving to the next line. Final answer: Six million, four hundred and seven thousand, two hundred and fifteen.</a:t>
             </a:r>
           </a:p>
         </p:txBody>
@@ -1291,7 +1291,7 @@
   </p:cSld>
   <p:clrMap bg1="lt1" tx1="dk1" bg2="lt2" tx2="dk2" accent1="accent1" accent2="accent2" accent3="accent3" accent4="accent4" accent5="accent5" accent6="accent6" hlink="hlink" folHlink="folHlink"/>
   <p:sldLayoutIdLst>
-    <p:sldLayoutId xmlns:r="http://schemas.openxmlformats.org/officeDocument/2006/relationships" id="2147483649" r:id="Rfe369cfa59464609"/>
+    <p:sldLayoutId xmlns:r="http://schemas.openxmlformats.org/officeDocument/2006/relationships" id="2147483649" r:id="R658dcea41f3d4abe"/>
   </p:sldLayoutIdLst>
   <p:txStyles>
     <p:titleStyle>
@@ -1842,7 +1842,7 @@
           <p:cNvPr id="12" name="">
             <a:extLst xmlns:a="http://schemas.openxmlformats.org/drawingml/2006/main">
               <a:ext uri="{FF2B5EF4-FFF2-40B4-BE49-F238E27FC236}">
-                <a16:creationId xmlns:a16="http://schemas.microsoft.com/office/drawing/2014/main" id="{31A582B7-FDC4-4A44-81C0-D917B3803641}"/>
+                <a16:creationId xmlns:a16="http://schemas.microsoft.com/office/drawing/2014/main" id="{0A471C67-1D53-4013-9AB6-6022ED5F7F65}"/>
               </a:ext>
             </a:extLst>
           </p:cNvPr>
@@ -1874,7 +1874,7 @@
           <p:cNvPr id="2" name="">
             <a:extLst xmlns:a="http://schemas.openxmlformats.org/drawingml/2006/main">
               <a:ext uri="{FF2B5EF4-FFF2-40B4-BE49-F238E27FC236}">
-                <a16:creationId xmlns:a16="http://schemas.microsoft.com/office/drawing/2014/main" id="{351ED061-A15E-4D2E-965A-A30601AEC147}"/>
+                <a16:creationId xmlns:a16="http://schemas.microsoft.com/office/drawing/2014/main" id="{BE8FD622-D859-4F8B-9427-9574B795F7A5}"/>
               </a:ext>
             </a:extLst>
           </p:cNvPr>
@@ -1931,7 +1931,7 @@
           <p:cNvPr id="3" name="">
             <a:extLst xmlns:a="http://schemas.openxmlformats.org/drawingml/2006/main">
               <a:ext uri="{FF2B5EF4-FFF2-40B4-BE49-F238E27FC236}">
-                <a16:creationId xmlns:a16="http://schemas.microsoft.com/office/drawing/2014/main" id="{B3881392-CACC-4C10-B986-111A2989F9B6}"/>
+                <a16:creationId xmlns:a16="http://schemas.microsoft.com/office/drawing/2014/main" id="{C3C70AE6-8AEE-49C3-A556-E94F6955DA29}"/>
               </a:ext>
             </a:extLst>
           </p:cNvPr>
@@ -1965,7 +1965,7 @@
           <p:cNvPr id="4" name="">
             <a:extLst xmlns:a="http://schemas.openxmlformats.org/drawingml/2006/main">
               <a:ext uri="{FF2B5EF4-FFF2-40B4-BE49-F238E27FC236}">
-                <a16:creationId xmlns:a16="http://schemas.microsoft.com/office/drawing/2014/main" id="{105E3385-1B4C-4A7E-BFFF-531795F0E5E0}"/>
+                <a16:creationId xmlns:a16="http://schemas.microsoft.com/office/drawing/2014/main" id="{4A99C540-6C2D-4C25-8583-3EF7F3FF06D4}"/>
               </a:ext>
             </a:extLst>
           </p:cNvPr>
@@ -2022,7 +2022,7 @@
           <p:cNvPr id="5" name="">
             <a:extLst xmlns:a="http://schemas.openxmlformats.org/drawingml/2006/main">
               <a:ext uri="{FF2B5EF4-FFF2-40B4-BE49-F238E27FC236}">
-                <a16:creationId xmlns:a16="http://schemas.microsoft.com/office/drawing/2014/main" id="{4944F767-2613-4F7D-972B-1AB2611940E4}"/>
+                <a16:creationId xmlns:a16="http://schemas.microsoft.com/office/drawing/2014/main" id="{998659E2-74E4-4E06-BF34-BDCAEE3459D9}"/>
               </a:ext>
             </a:extLst>
           </p:cNvPr>
@@ -2079,7 +2079,7 @@
           <p:cNvPr id="6" name="">
             <a:extLst xmlns:a="http://schemas.openxmlformats.org/drawingml/2006/main">
               <a:ext uri="{FF2B5EF4-FFF2-40B4-BE49-F238E27FC236}">
-                <a16:creationId xmlns:a16="http://schemas.microsoft.com/office/drawing/2014/main" id="{05B980ED-DEA3-4B9E-8648-DAD1F98A77EF}"/>
+                <a16:creationId xmlns:a16="http://schemas.microsoft.com/office/drawing/2014/main" id="{96D8BBB6-1D19-4E03-BDE2-4D7B3BBDE7BC}"/>
               </a:ext>
             </a:extLst>
           </p:cNvPr>
@@ -2113,7 +2113,7 @@
           <p:cNvPr id="7" name="">
             <a:extLst xmlns:a="http://schemas.openxmlformats.org/drawingml/2006/main">
               <a:ext uri="{FF2B5EF4-FFF2-40B4-BE49-F238E27FC236}">
-                <a16:creationId xmlns:a16="http://schemas.microsoft.com/office/drawing/2014/main" id="{81728B39-61DA-4C10-BDB6-17CF9D5FE309}"/>
+                <a16:creationId xmlns:a16="http://schemas.microsoft.com/office/drawing/2014/main" id="{BB36EB7D-34D5-4383-B3FC-8217AE3F17A8}"/>
               </a:ext>
             </a:extLst>
           </p:cNvPr>
@@ -2170,7 +2170,7 @@
           <p:cNvPr id="8" name="">
             <a:extLst xmlns:a="http://schemas.openxmlformats.org/drawingml/2006/main">
               <a:ext uri="{FF2B5EF4-FFF2-40B4-BE49-F238E27FC236}">
-                <a16:creationId xmlns:a16="http://schemas.microsoft.com/office/drawing/2014/main" id="{034B1D13-ABDB-44BE-9730-BDF118C606A0}"/>
+                <a16:creationId xmlns:a16="http://schemas.microsoft.com/office/drawing/2014/main" id="{8D29EABB-3048-4585-8365-008EEE99B019}"/>
               </a:ext>
             </a:extLst>
           </p:cNvPr>
@@ -2227,7 +2227,7 @@
           <p:cNvPr id="9" name="">
             <a:extLst xmlns:a="http://schemas.openxmlformats.org/drawingml/2006/main">
               <a:ext uri="{FF2B5EF4-FFF2-40B4-BE49-F238E27FC236}">
-                <a16:creationId xmlns:a16="http://schemas.microsoft.com/office/drawing/2014/main" id="{EC5BCEFA-6AF5-4552-B163-5E3340333264}"/>
+                <a16:creationId xmlns:a16="http://schemas.microsoft.com/office/drawing/2014/main" id="{8020B438-1DB1-4B6E-83EA-8267CCD8BF7A}"/>
               </a:ext>
             </a:extLst>
           </p:cNvPr>
@@ -2284,7 +2284,7 @@
           <p:cNvPr id="10" name="">
             <a:extLst xmlns:a="http://schemas.openxmlformats.org/drawingml/2006/main">
               <a:ext uri="{FF2B5EF4-FFF2-40B4-BE49-F238E27FC236}">
-                <a16:creationId xmlns:a16="http://schemas.microsoft.com/office/drawing/2014/main" id="{C64E27F4-33BD-4A37-8023-8B5E76E75B88}"/>
+                <a16:creationId xmlns:a16="http://schemas.microsoft.com/office/drawing/2014/main" id="{67CF2E94-ECA1-4982-8B04-758CDAFD98E9}"/>
               </a:ext>
             </a:extLst>
           </p:cNvPr>
@@ -2341,7 +2341,7 @@
           <p:cNvPr id="11" name="">
             <a:extLst xmlns:a="http://schemas.openxmlformats.org/drawingml/2006/main">
               <a:ext uri="{FF2B5EF4-FFF2-40B4-BE49-F238E27FC236}">
-                <a16:creationId xmlns:a16="http://schemas.microsoft.com/office/drawing/2014/main" id="{232046C1-6A7B-4EE0-B9BE-3EE05A466BAA}"/>
+                <a16:creationId xmlns:a16="http://schemas.microsoft.com/office/drawing/2014/main" id="{FBAB0F2B-5336-443E-A0B7-717917B237EF}"/>
               </a:ext>
             </a:extLst>
           </p:cNvPr>
@@ -2396,7 +2396,7 @@
     </p:spTree>
     <p:extLst>
       <p:ext uri="{BB962C8B-B14F-4D97-AF65-F5344CB8AC3E}">
-        <p14:creationId xmlns:p14="http://schemas.microsoft.com/office/powerpoint/2010/main" val="466362498"/>
+        <p14:creationId xmlns:p14="http://schemas.microsoft.com/office/powerpoint/2010/main" val="2122431774"/>
       </p:ext>
     </p:extLst>
   </p:cSld>
@@ -2427,7 +2427,7 @@
           <p:cNvPr id="14" name="">
             <a:extLst xmlns:a="http://schemas.openxmlformats.org/drawingml/2006/main">
               <a:ext uri="{FF2B5EF4-FFF2-40B4-BE49-F238E27FC236}">
-                <a16:creationId xmlns:a16="http://schemas.microsoft.com/office/drawing/2014/main" id="{B8BCD1F4-438A-4605-BF82-79885E924366}"/>
+                <a16:creationId xmlns:a16="http://schemas.microsoft.com/office/drawing/2014/main" id="{4B37B823-81A7-4613-93FB-49954F2679F8}"/>
               </a:ext>
             </a:extLst>
           </p:cNvPr>
@@ -2459,7 +2459,7 @@
           <p:cNvPr id="2" name="">
             <a:extLst xmlns:a="http://schemas.openxmlformats.org/drawingml/2006/main">
               <a:ext uri="{FF2B5EF4-FFF2-40B4-BE49-F238E27FC236}">
-                <a16:creationId xmlns:a16="http://schemas.microsoft.com/office/drawing/2014/main" id="{7C492659-E140-4899-AEBF-308D74FFA23C}"/>
+                <a16:creationId xmlns:a16="http://schemas.microsoft.com/office/drawing/2014/main" id="{D4550E92-7DDF-4E37-AAAB-915000AD5377}"/>
               </a:ext>
             </a:extLst>
           </p:cNvPr>
@@ -2516,7 +2516,7 @@
           <p:cNvPr id="3" name="">
             <a:extLst xmlns:a="http://schemas.openxmlformats.org/drawingml/2006/main">
               <a:ext uri="{FF2B5EF4-FFF2-40B4-BE49-F238E27FC236}">
-                <a16:creationId xmlns:a16="http://schemas.microsoft.com/office/drawing/2014/main" id="{982E92EB-CB92-46DB-BA75-07BD0BC1E9F7}"/>
+                <a16:creationId xmlns:a16="http://schemas.microsoft.com/office/drawing/2014/main" id="{8AD6E65F-77E2-4034-A697-562A1F23CC9A}"/>
               </a:ext>
             </a:extLst>
           </p:cNvPr>
@@ -2548,7 +2548,7 @@
           <p:cNvPr id="4" name="">
             <a:extLst xmlns:a="http://schemas.openxmlformats.org/drawingml/2006/main">
               <a:ext uri="{FF2B5EF4-FFF2-40B4-BE49-F238E27FC236}">
-                <a16:creationId xmlns:a16="http://schemas.microsoft.com/office/drawing/2014/main" id="{A73AC91A-E0D9-4A86-AEAB-B766F191E249}"/>
+                <a16:creationId xmlns:a16="http://schemas.microsoft.com/office/drawing/2014/main" id="{E4853384-C02F-4A4B-B1C9-57DD95F3AC0C}"/>
               </a:ext>
             </a:extLst>
           </p:cNvPr>
@@ -2605,7 +2605,7 @@
           <p:cNvPr id="5" name="">
             <a:extLst xmlns:a="http://schemas.openxmlformats.org/drawingml/2006/main">
               <a:ext uri="{FF2B5EF4-FFF2-40B4-BE49-F238E27FC236}">
-                <a16:creationId xmlns:a16="http://schemas.microsoft.com/office/drawing/2014/main" id="{E0FACA74-E129-45A6-9797-63DB72D952E0}"/>
+                <a16:creationId xmlns:a16="http://schemas.microsoft.com/office/drawing/2014/main" id="{569D9FDF-2EE7-4677-84A1-8C331096880F}"/>
               </a:ext>
             </a:extLst>
           </p:cNvPr>
@@ -2662,7 +2662,7 @@
           <p:cNvPr id="6" name="">
             <a:extLst xmlns:a="http://schemas.openxmlformats.org/drawingml/2006/main">
               <a:ext uri="{FF2B5EF4-FFF2-40B4-BE49-F238E27FC236}">
-                <a16:creationId xmlns:a16="http://schemas.microsoft.com/office/drawing/2014/main" id="{62CC7737-5544-4F04-BEC3-5B98EF7A915A}"/>
+                <a16:creationId xmlns:a16="http://schemas.microsoft.com/office/drawing/2014/main" id="{274581C9-6A9F-4F2E-9E61-4A5BAFA802CF}"/>
               </a:ext>
             </a:extLst>
           </p:cNvPr>
@@ -2719,7 +2719,7 @@
           <p:cNvPr id="7" name="">
             <a:extLst xmlns:a="http://schemas.openxmlformats.org/drawingml/2006/main">
               <a:ext uri="{FF2B5EF4-FFF2-40B4-BE49-F238E27FC236}">
-                <a16:creationId xmlns:a16="http://schemas.microsoft.com/office/drawing/2014/main" id="{9D85B67E-76E7-45E9-AA4B-7F406A26772B}"/>
+                <a16:creationId xmlns:a16="http://schemas.microsoft.com/office/drawing/2014/main" id="{D4B7C50D-3A30-46AF-B3BD-880F071A3E1D}"/>
               </a:ext>
             </a:extLst>
           </p:cNvPr>
@@ -2751,7 +2751,7 @@
           <p:cNvPr id="8" name="">
             <a:extLst xmlns:a="http://schemas.openxmlformats.org/drawingml/2006/main">
               <a:ext uri="{FF2B5EF4-FFF2-40B4-BE49-F238E27FC236}">
-                <a16:creationId xmlns:a16="http://schemas.microsoft.com/office/drawing/2014/main" id="{7FE0CBCA-7DD8-45A1-A6E7-2C807D9251A6}"/>
+                <a16:creationId xmlns:a16="http://schemas.microsoft.com/office/drawing/2014/main" id="{3867916B-F99A-4C86-A349-8908614D4CF5}"/>
               </a:ext>
             </a:extLst>
           </p:cNvPr>
@@ -2808,7 +2808,7 @@
           <p:cNvPr id="9" name="">
             <a:extLst xmlns:a="http://schemas.openxmlformats.org/drawingml/2006/main">
               <a:ext uri="{FF2B5EF4-FFF2-40B4-BE49-F238E27FC236}">
-                <a16:creationId xmlns:a16="http://schemas.microsoft.com/office/drawing/2014/main" id="{B722A3EA-D356-489D-9668-350BAA6C4C96}"/>
+                <a16:creationId xmlns:a16="http://schemas.microsoft.com/office/drawing/2014/main" id="{3FAA6B36-65D5-4974-BB7A-E978105B9399}"/>
               </a:ext>
             </a:extLst>
           </p:cNvPr>
@@ -2865,7 +2865,7 @@
           <p:cNvPr id="10" name="">
             <a:extLst xmlns:a="http://schemas.openxmlformats.org/drawingml/2006/main">
               <a:ext uri="{FF2B5EF4-FFF2-40B4-BE49-F238E27FC236}">
-                <a16:creationId xmlns:a16="http://schemas.microsoft.com/office/drawing/2014/main" id="{8332E70E-F57D-4B80-ABE8-AFD4D5C9D8A6}"/>
+                <a16:creationId xmlns:a16="http://schemas.microsoft.com/office/drawing/2014/main" id="{22134307-36E3-4D82-9D3D-7DD56ADC7B1E}"/>
               </a:ext>
             </a:extLst>
           </p:cNvPr>
@@ -2922,7 +2922,7 @@
           <p:cNvPr id="11" name="">
             <a:extLst xmlns:a="http://schemas.openxmlformats.org/drawingml/2006/main">
               <a:ext uri="{FF2B5EF4-FFF2-40B4-BE49-F238E27FC236}">
-                <a16:creationId xmlns:a16="http://schemas.microsoft.com/office/drawing/2014/main" id="{9F7816BC-9DD8-4DE3-A4F3-1AE6E846407E}"/>
+                <a16:creationId xmlns:a16="http://schemas.microsoft.com/office/drawing/2014/main" id="{60C59DB1-C7ED-41DE-A35D-E53F76C2CB66}"/>
               </a:ext>
             </a:extLst>
           </p:cNvPr>
@@ -2979,7 +2979,7 @@
           <p:cNvPr id="12" name="">
             <a:extLst xmlns:a="http://schemas.openxmlformats.org/drawingml/2006/main">
               <a:ext uri="{FF2B5EF4-FFF2-40B4-BE49-F238E27FC236}">
-                <a16:creationId xmlns:a16="http://schemas.microsoft.com/office/drawing/2014/main" id="{FBDF4F08-60DC-4653-A208-ACF6A6021694}"/>
+                <a16:creationId xmlns:a16="http://schemas.microsoft.com/office/drawing/2014/main" id="{7DB98AFB-65F3-445F-B9A4-FFA1A7148C0E}"/>
               </a:ext>
             </a:extLst>
           </p:cNvPr>
@@ -3036,7 +3036,7 @@
           <p:cNvPr id="13" name="">
             <a:extLst xmlns:a="http://schemas.openxmlformats.org/drawingml/2006/main">
               <a:ext uri="{FF2B5EF4-FFF2-40B4-BE49-F238E27FC236}">
-                <a16:creationId xmlns:a16="http://schemas.microsoft.com/office/drawing/2014/main" id="{5326A368-F2FB-45BB-88B3-B06216387AF4}"/>
+                <a16:creationId xmlns:a16="http://schemas.microsoft.com/office/drawing/2014/main" id="{F71E339A-A775-4160-AC78-571B2C038819}"/>
               </a:ext>
             </a:extLst>
           </p:cNvPr>
@@ -3091,7 +3091,7 @@
     </p:spTree>
     <p:extLst>
       <p:ext uri="{BB962C8B-B14F-4D97-AF65-F5344CB8AC3E}">
-        <p14:creationId xmlns:p14="http://schemas.microsoft.com/office/powerpoint/2010/main" val="319095977"/>
+        <p14:creationId xmlns:p14="http://schemas.microsoft.com/office/powerpoint/2010/main" val="1699868872"/>
       </p:ext>
     </p:extLst>
   </p:cSld>
@@ -3292,7 +3292,7 @@
           <p:cNvPr id="19" name="">
             <a:extLst xmlns:a="http://schemas.openxmlformats.org/drawingml/2006/main">
               <a:ext uri="{FF2B5EF4-FFF2-40B4-BE49-F238E27FC236}">
-                <a16:creationId xmlns:a16="http://schemas.microsoft.com/office/drawing/2014/main" id="{D2419A4C-72C9-4EE0-A909-A46C8D7E7670}"/>
+                <a16:creationId xmlns:a16="http://schemas.microsoft.com/office/drawing/2014/main" id="{62B3216A-ACC1-4B02-A6E4-812D9930C9F2}"/>
               </a:ext>
             </a:extLst>
           </p:cNvPr>
@@ -3324,7 +3324,7 @@
           <p:cNvPr id="2" name="">
             <a:extLst xmlns:a="http://schemas.openxmlformats.org/drawingml/2006/main">
               <a:ext uri="{FF2B5EF4-FFF2-40B4-BE49-F238E27FC236}">
-                <a16:creationId xmlns:a16="http://schemas.microsoft.com/office/drawing/2014/main" id="{ADD96C0B-CE62-4A21-9497-220822CAD896}"/>
+                <a16:creationId xmlns:a16="http://schemas.microsoft.com/office/drawing/2014/main" id="{C2AE17DF-604E-45EF-B158-CE5D0885D375}"/>
               </a:ext>
             </a:extLst>
           </p:cNvPr>
@@ -3381,7 +3381,7 @@
           <p:cNvPr id="3" name="">
             <a:extLst xmlns:a="http://schemas.openxmlformats.org/drawingml/2006/main">
               <a:ext uri="{FF2B5EF4-FFF2-40B4-BE49-F238E27FC236}">
-                <a16:creationId xmlns:a16="http://schemas.microsoft.com/office/drawing/2014/main" id="{3CEFE643-9189-424E-8961-DC67446BA04B}"/>
+                <a16:creationId xmlns:a16="http://schemas.microsoft.com/office/drawing/2014/main" id="{E7343B44-1AEF-4018-9F23-E7A9EFE0ADE5}"/>
               </a:ext>
             </a:extLst>
           </p:cNvPr>
@@ -3413,7 +3413,7 @@
           <p:cNvPr id="4" name="">
             <a:extLst xmlns:a="http://schemas.openxmlformats.org/drawingml/2006/main">
               <a:ext uri="{FF2B5EF4-FFF2-40B4-BE49-F238E27FC236}">
-                <a16:creationId xmlns:a16="http://schemas.microsoft.com/office/drawing/2014/main" id="{BAFD4623-48C7-49D4-AD1F-22102E68A3F0}"/>
+                <a16:creationId xmlns:a16="http://schemas.microsoft.com/office/drawing/2014/main" id="{65CAF203-0791-4AFE-A4E6-C92157590AC8}"/>
               </a:ext>
             </a:extLst>
           </p:cNvPr>
@@ -3470,7 +3470,7 @@
           <p:cNvPr id="5" name="">
             <a:extLst xmlns:a="http://schemas.openxmlformats.org/drawingml/2006/main">
               <a:ext uri="{FF2B5EF4-FFF2-40B4-BE49-F238E27FC236}">
-                <a16:creationId xmlns:a16="http://schemas.microsoft.com/office/drawing/2014/main" id="{C514EA91-C9DC-4D93-930C-9A82BCF5B9C6}"/>
+                <a16:creationId xmlns:a16="http://schemas.microsoft.com/office/drawing/2014/main" id="{A34A0AE4-10FB-417A-909D-A4552A8CC937}"/>
               </a:ext>
             </a:extLst>
           </p:cNvPr>
@@ -3527,7 +3527,7 @@
           <p:cNvPr id="6" name="">
             <a:extLst xmlns:a="http://schemas.openxmlformats.org/drawingml/2006/main">
               <a:ext uri="{FF2B5EF4-FFF2-40B4-BE49-F238E27FC236}">
-                <a16:creationId xmlns:a16="http://schemas.microsoft.com/office/drawing/2014/main" id="{CC18DF16-3B4E-40DB-A906-65FDD6E75624}"/>
+                <a16:creationId xmlns:a16="http://schemas.microsoft.com/office/drawing/2014/main" id="{A6D6AE05-B0C5-4997-BDFA-79AD397504C0}"/>
               </a:ext>
             </a:extLst>
           </p:cNvPr>
@@ -3584,7 +3584,7 @@
           <p:cNvPr id="7" name="">
             <a:extLst xmlns:a="http://schemas.openxmlformats.org/drawingml/2006/main">
               <a:ext uri="{FF2B5EF4-FFF2-40B4-BE49-F238E27FC236}">
-                <a16:creationId xmlns:a16="http://schemas.microsoft.com/office/drawing/2014/main" id="{E3B7EED8-04FD-4C2F-A9E5-9B30DF73A304}"/>
+                <a16:creationId xmlns:a16="http://schemas.microsoft.com/office/drawing/2014/main" id="{82477D38-620B-44A7-A717-00C4F378FC84}"/>
               </a:ext>
             </a:extLst>
           </p:cNvPr>
@@ -3616,7 +3616,7 @@
           <p:cNvPr id="8" name="">
             <a:extLst xmlns:a="http://schemas.openxmlformats.org/drawingml/2006/main">
               <a:ext uri="{FF2B5EF4-FFF2-40B4-BE49-F238E27FC236}">
-                <a16:creationId xmlns:a16="http://schemas.microsoft.com/office/drawing/2014/main" id="{E6D676AF-7A82-4281-8604-D6509E27B31C}"/>
+                <a16:creationId xmlns:a16="http://schemas.microsoft.com/office/drawing/2014/main" id="{4AF44A0C-3DA2-4381-84B4-2A2A4855920E}"/>
               </a:ext>
             </a:extLst>
           </p:cNvPr>
@@ -3673,7 +3673,7 @@
           <p:cNvPr id="9" name="">
             <a:extLst xmlns:a="http://schemas.openxmlformats.org/drawingml/2006/main">
               <a:ext uri="{FF2B5EF4-FFF2-40B4-BE49-F238E27FC236}">
-                <a16:creationId xmlns:a16="http://schemas.microsoft.com/office/drawing/2014/main" id="{AA7C948D-89A7-4AC9-8EBA-019B5238932C}"/>
+                <a16:creationId xmlns:a16="http://schemas.microsoft.com/office/drawing/2014/main" id="{03710F06-952A-4EA6-B1F7-AC45C1C1CA39}"/>
               </a:ext>
             </a:extLst>
           </p:cNvPr>
@@ -3730,7 +3730,7 @@
           <p:cNvPr id="10" name="">
             <a:extLst xmlns:a="http://schemas.openxmlformats.org/drawingml/2006/main">
               <a:ext uri="{FF2B5EF4-FFF2-40B4-BE49-F238E27FC236}">
-                <a16:creationId xmlns:a16="http://schemas.microsoft.com/office/drawing/2014/main" id="{9FA2D21D-AB23-432A-82A5-963AA2A464D0}"/>
+                <a16:creationId xmlns:a16="http://schemas.microsoft.com/office/drawing/2014/main" id="{27875905-AB9F-44BD-A758-50E9A038ABA8}"/>
               </a:ext>
             </a:extLst>
           </p:cNvPr>
@@ -3787,7 +3787,7 @@
           <p:cNvPr id="11" name="">
             <a:extLst xmlns:a="http://schemas.openxmlformats.org/drawingml/2006/main">
               <a:ext uri="{FF2B5EF4-FFF2-40B4-BE49-F238E27FC236}">
-                <a16:creationId xmlns:a16="http://schemas.microsoft.com/office/drawing/2014/main" id="{33D55183-B860-4933-9509-309F49536699}"/>
+                <a16:creationId xmlns:a16="http://schemas.microsoft.com/office/drawing/2014/main" id="{E858D272-703A-4C4D-BE82-64DC209A2444}"/>
               </a:ext>
             </a:extLst>
           </p:cNvPr>
@@ -3821,7 +3821,7 @@
           <p:cNvPr id="12" name="">
             <a:extLst xmlns:a="http://schemas.openxmlformats.org/drawingml/2006/main">
               <a:ext uri="{FF2B5EF4-FFF2-40B4-BE49-F238E27FC236}">
-                <a16:creationId xmlns:a16="http://schemas.microsoft.com/office/drawing/2014/main" id="{C2D6AB84-4EA2-4BBF-8563-2C994085E9AC}"/>
+                <a16:creationId xmlns:a16="http://schemas.microsoft.com/office/drawing/2014/main" id="{C3F88DF7-10A8-44B5-9FF0-A3FCE1AA0360}"/>
               </a:ext>
             </a:extLst>
           </p:cNvPr>
@@ -3878,7 +3878,7 @@
           <p:cNvPr id="13" name="">
             <a:extLst xmlns:a="http://schemas.openxmlformats.org/drawingml/2006/main">
               <a:ext uri="{FF2B5EF4-FFF2-40B4-BE49-F238E27FC236}">
-                <a16:creationId xmlns:a16="http://schemas.microsoft.com/office/drawing/2014/main" id="{E3159B06-1FCD-4F6D-ADEC-9293AD3AED88}"/>
+                <a16:creationId xmlns:a16="http://schemas.microsoft.com/office/drawing/2014/main" id="{04382A57-C990-405D-B297-08C202FC3F89}"/>
               </a:ext>
             </a:extLst>
           </p:cNvPr>
@@ -3935,7 +3935,7 @@
           <p:cNvPr id="14" name="">
             <a:extLst xmlns:a="http://schemas.openxmlformats.org/drawingml/2006/main">
               <a:ext uri="{FF2B5EF4-FFF2-40B4-BE49-F238E27FC236}">
-                <a16:creationId xmlns:a16="http://schemas.microsoft.com/office/drawing/2014/main" id="{337E1263-D532-4441-80A6-7673CEF9EBD8}"/>
+                <a16:creationId xmlns:a16="http://schemas.microsoft.com/office/drawing/2014/main" id="{7B8C5B8C-5859-42AB-8215-3655359D44C4}"/>
               </a:ext>
             </a:extLst>
           </p:cNvPr>
@@ -3992,7 +3992,7 @@
           <p:cNvPr id="15" name="">
             <a:extLst xmlns:a="http://schemas.openxmlformats.org/drawingml/2006/main">
               <a:ext uri="{FF2B5EF4-FFF2-40B4-BE49-F238E27FC236}">
-                <a16:creationId xmlns:a16="http://schemas.microsoft.com/office/drawing/2014/main" id="{67FEF3E9-0880-4C27-A9D6-DB8F22A093E2}"/>
+                <a16:creationId xmlns:a16="http://schemas.microsoft.com/office/drawing/2014/main" id="{C4152904-F8AA-4B56-BD51-D7756374046F}"/>
               </a:ext>
             </a:extLst>
           </p:cNvPr>
@@ -4026,7 +4026,7 @@
           <p:cNvPr id="16" name="">
             <a:extLst xmlns:a="http://schemas.openxmlformats.org/drawingml/2006/main">
               <a:ext uri="{FF2B5EF4-FFF2-40B4-BE49-F238E27FC236}">
-                <a16:creationId xmlns:a16="http://schemas.microsoft.com/office/drawing/2014/main" id="{4671B7D4-14C7-4C50-9CD8-1B343F372332}"/>
+                <a16:creationId xmlns:a16="http://schemas.microsoft.com/office/drawing/2014/main" id="{6F385F56-4180-4991-8C8E-0D54B9D8CBA8}"/>
               </a:ext>
             </a:extLst>
           </p:cNvPr>
@@ -4083,7 +4083,7 @@
           <p:cNvPr id="17" name="">
             <a:extLst xmlns:a="http://schemas.openxmlformats.org/drawingml/2006/main">
               <a:ext uri="{FF2B5EF4-FFF2-40B4-BE49-F238E27FC236}">
-                <a16:creationId xmlns:a16="http://schemas.microsoft.com/office/drawing/2014/main" id="{18875B5F-487C-43A8-B730-5080A7C97B0B}"/>
+                <a16:creationId xmlns:a16="http://schemas.microsoft.com/office/drawing/2014/main" id="{8A44D2E9-65F0-4E0A-873A-21E6C431155B}"/>
               </a:ext>
             </a:extLst>
           </p:cNvPr>
@@ -4140,7 +4140,7 @@
           <p:cNvPr id="18" name="">
             <a:extLst xmlns:a="http://schemas.openxmlformats.org/drawingml/2006/main">
               <a:ext uri="{FF2B5EF4-FFF2-40B4-BE49-F238E27FC236}">
-                <a16:creationId xmlns:a16="http://schemas.microsoft.com/office/drawing/2014/main" id="{FBD34C34-A015-4143-8CBF-EFB03AF12C49}"/>
+                <a16:creationId xmlns:a16="http://schemas.microsoft.com/office/drawing/2014/main" id="{16F72035-E759-420C-93F1-90C5B9449BEC}"/>
               </a:ext>
             </a:extLst>
           </p:cNvPr>
@@ -4195,7 +4195,7 @@
     </p:spTree>
     <p:extLst>
       <p:ext uri="{BB962C8B-B14F-4D97-AF65-F5344CB8AC3E}">
-        <p14:creationId xmlns:p14="http://schemas.microsoft.com/office/powerpoint/2010/main" val="710850742"/>
+        <p14:creationId xmlns:p14="http://schemas.microsoft.com/office/powerpoint/2010/main" val="1047174491"/>
       </p:ext>
     </p:extLst>
   </p:cSld>
@@ -4350,7 +4350,7 @@
           <p:cNvPr id="23" name="">
             <a:extLst xmlns:a="http://schemas.openxmlformats.org/drawingml/2006/main">
               <a:ext uri="{FF2B5EF4-FFF2-40B4-BE49-F238E27FC236}">
-                <a16:creationId xmlns:a16="http://schemas.microsoft.com/office/drawing/2014/main" id="{CF7E4EB8-5CDE-4E62-BEA2-85D00C8F978C}"/>
+                <a16:creationId xmlns:a16="http://schemas.microsoft.com/office/drawing/2014/main" id="{16FD4F53-8B85-4D84-8D43-23D4F8A03347}"/>
               </a:ext>
             </a:extLst>
           </p:cNvPr>
@@ -4382,7 +4382,7 @@
           <p:cNvPr id="2" name="">
             <a:extLst xmlns:a="http://schemas.openxmlformats.org/drawingml/2006/main">
               <a:ext uri="{FF2B5EF4-FFF2-40B4-BE49-F238E27FC236}">
-                <a16:creationId xmlns:a16="http://schemas.microsoft.com/office/drawing/2014/main" id="{97770741-3BEF-421C-9E73-FAF1E2B50613}"/>
+                <a16:creationId xmlns:a16="http://schemas.microsoft.com/office/drawing/2014/main" id="{DFBEBEF3-4029-48DB-AB57-3835D5A819C0}"/>
               </a:ext>
             </a:extLst>
           </p:cNvPr>
@@ -4439,7 +4439,7 @@
           <p:cNvPr id="3" name="">
             <a:extLst xmlns:a="http://schemas.openxmlformats.org/drawingml/2006/main">
               <a:ext uri="{FF2B5EF4-FFF2-40B4-BE49-F238E27FC236}">
-                <a16:creationId xmlns:a16="http://schemas.microsoft.com/office/drawing/2014/main" id="{7BB1AAB4-F5F0-4AED-BA5A-C915F2F1BC69}"/>
+                <a16:creationId xmlns:a16="http://schemas.microsoft.com/office/drawing/2014/main" id="{D5DCCA65-9254-4D40-BE34-BBDE9248D1AF}"/>
               </a:ext>
             </a:extLst>
           </p:cNvPr>
@@ -4471,7 +4471,7 @@
           <p:cNvPr id="4" name="">
             <a:extLst xmlns:a="http://schemas.openxmlformats.org/drawingml/2006/main">
               <a:ext uri="{FF2B5EF4-FFF2-40B4-BE49-F238E27FC236}">
-                <a16:creationId xmlns:a16="http://schemas.microsoft.com/office/drawing/2014/main" id="{6D6F7333-CBF9-4F65-B31B-1AFF2C4350B5}"/>
+                <a16:creationId xmlns:a16="http://schemas.microsoft.com/office/drawing/2014/main" id="{FB462759-7247-4FB2-B91F-3485ABFB03AB}"/>
               </a:ext>
             </a:extLst>
           </p:cNvPr>
@@ -4528,7 +4528,7 @@
           <p:cNvPr id="5" name="">
             <a:extLst xmlns:a="http://schemas.openxmlformats.org/drawingml/2006/main">
               <a:ext uri="{FF2B5EF4-FFF2-40B4-BE49-F238E27FC236}">
-                <a16:creationId xmlns:a16="http://schemas.microsoft.com/office/drawing/2014/main" id="{7C51DB7A-2FC0-482C-BEBC-0175E6B9291B}"/>
+                <a16:creationId xmlns:a16="http://schemas.microsoft.com/office/drawing/2014/main" id="{CE9CB68D-7476-4813-9420-DC745605A559}"/>
               </a:ext>
             </a:extLst>
           </p:cNvPr>
@@ -4585,7 +4585,7 @@
           <p:cNvPr id="6" name="">
             <a:extLst xmlns:a="http://schemas.openxmlformats.org/drawingml/2006/main">
               <a:ext uri="{FF2B5EF4-FFF2-40B4-BE49-F238E27FC236}">
-                <a16:creationId xmlns:a16="http://schemas.microsoft.com/office/drawing/2014/main" id="{AFFFFC40-96B2-48D7-9F3C-777A422E391D}"/>
+                <a16:creationId xmlns:a16="http://schemas.microsoft.com/office/drawing/2014/main" id="{D55009B7-7193-41CC-9DDF-4FB602DFD866}"/>
               </a:ext>
             </a:extLst>
           </p:cNvPr>
@@ -4642,7 +4642,7 @@
           <p:cNvPr id="7" name="">
             <a:extLst xmlns:a="http://schemas.openxmlformats.org/drawingml/2006/main">
               <a:ext uri="{FF2B5EF4-FFF2-40B4-BE49-F238E27FC236}">
-                <a16:creationId xmlns:a16="http://schemas.microsoft.com/office/drawing/2014/main" id="{4F6F8B21-4848-4A17-B97E-1FF70AD56978}"/>
+                <a16:creationId xmlns:a16="http://schemas.microsoft.com/office/drawing/2014/main" id="{61FE2440-7F34-40DC-A71B-EB817876EAEE}"/>
               </a:ext>
             </a:extLst>
           </p:cNvPr>
@@ -4674,7 +4674,7 @@
           <p:cNvPr id="8" name="">
             <a:extLst xmlns:a="http://schemas.openxmlformats.org/drawingml/2006/main">
               <a:ext uri="{FF2B5EF4-FFF2-40B4-BE49-F238E27FC236}">
-                <a16:creationId xmlns:a16="http://schemas.microsoft.com/office/drawing/2014/main" id="{B8B6ADAE-9D1E-4630-BA24-D88AA7ABF1AD}"/>
+                <a16:creationId xmlns:a16="http://schemas.microsoft.com/office/drawing/2014/main" id="{05E21918-067F-42BD-A070-62C677BED5A4}"/>
               </a:ext>
             </a:extLst>
           </p:cNvPr>
@@ -4731,7 +4731,7 @@
           <p:cNvPr id="9" name="">
             <a:extLst xmlns:a="http://schemas.openxmlformats.org/drawingml/2006/main">
               <a:ext uri="{FF2B5EF4-FFF2-40B4-BE49-F238E27FC236}">
-                <a16:creationId xmlns:a16="http://schemas.microsoft.com/office/drawing/2014/main" id="{95F10EDC-897C-43AE-BBFE-4B638FC34506}"/>
+                <a16:creationId xmlns:a16="http://schemas.microsoft.com/office/drawing/2014/main" id="{7C6A4996-4350-42AA-A23B-67A1F74D22F8}"/>
               </a:ext>
             </a:extLst>
           </p:cNvPr>
@@ -4788,7 +4788,7 @@
           <p:cNvPr id="10" name="">
             <a:extLst xmlns:a="http://schemas.openxmlformats.org/drawingml/2006/main">
               <a:ext uri="{FF2B5EF4-FFF2-40B4-BE49-F238E27FC236}">
-                <a16:creationId xmlns:a16="http://schemas.microsoft.com/office/drawing/2014/main" id="{CF03E999-C6DE-4329-B21E-FE1DF5660101}"/>
+                <a16:creationId xmlns:a16="http://schemas.microsoft.com/office/drawing/2014/main" id="{7B0CB084-98FD-4845-8FDB-ACF134A5522D}"/>
               </a:ext>
             </a:extLst>
           </p:cNvPr>
@@ -4822,7 +4822,7 @@
           <p:cNvPr id="11" name="">
             <a:extLst xmlns:a="http://schemas.openxmlformats.org/drawingml/2006/main">
               <a:ext uri="{FF2B5EF4-FFF2-40B4-BE49-F238E27FC236}">
-                <a16:creationId xmlns:a16="http://schemas.microsoft.com/office/drawing/2014/main" id="{128F3CF8-EFDA-4E6C-B95F-E4CADD4109A4}"/>
+                <a16:creationId xmlns:a16="http://schemas.microsoft.com/office/drawing/2014/main" id="{AFFF95E8-1073-4F70-91CF-BF1BCC09A535}"/>
               </a:ext>
             </a:extLst>
           </p:cNvPr>
@@ -4854,7 +4854,7 @@
           <p:cNvPr id="12" name="">
             <a:extLst xmlns:a="http://schemas.openxmlformats.org/drawingml/2006/main">
               <a:ext uri="{FF2B5EF4-FFF2-40B4-BE49-F238E27FC236}">
-                <a16:creationId xmlns:a16="http://schemas.microsoft.com/office/drawing/2014/main" id="{1F530FE1-7963-4438-8884-2D247611F350}"/>
+                <a16:creationId xmlns:a16="http://schemas.microsoft.com/office/drawing/2014/main" id="{8AB6FE75-DF48-4A07-B254-C6F60DEA3B84}"/>
               </a:ext>
             </a:extLst>
           </p:cNvPr>
@@ -4911,7 +4911,7 @@
           <p:cNvPr id="13" name="">
             <a:extLst xmlns:a="http://schemas.openxmlformats.org/drawingml/2006/main">
               <a:ext uri="{FF2B5EF4-FFF2-40B4-BE49-F238E27FC236}">
-                <a16:creationId xmlns:a16="http://schemas.microsoft.com/office/drawing/2014/main" id="{65AD64AD-FB7A-4C80-9928-0A05B3000844}"/>
+                <a16:creationId xmlns:a16="http://schemas.microsoft.com/office/drawing/2014/main" id="{9CA025C1-32FF-400A-A56B-280156008802}"/>
               </a:ext>
             </a:extLst>
           </p:cNvPr>
@@ -4968,7 +4968,7 @@
           <p:cNvPr id="14" name="">
             <a:extLst xmlns:a="http://schemas.openxmlformats.org/drawingml/2006/main">
               <a:ext uri="{FF2B5EF4-FFF2-40B4-BE49-F238E27FC236}">
-                <a16:creationId xmlns:a16="http://schemas.microsoft.com/office/drawing/2014/main" id="{CA2E3F4B-D675-4372-A10E-ADE6E0936974}"/>
+                <a16:creationId xmlns:a16="http://schemas.microsoft.com/office/drawing/2014/main" id="{10B90CB1-61FD-4722-A05A-38FD46862483}"/>
               </a:ext>
             </a:extLst>
           </p:cNvPr>
@@ -5002,7 +5002,7 @@
           <p:cNvPr id="15" name="">
             <a:extLst xmlns:a="http://schemas.openxmlformats.org/drawingml/2006/main">
               <a:ext uri="{FF2B5EF4-FFF2-40B4-BE49-F238E27FC236}">
-                <a16:creationId xmlns:a16="http://schemas.microsoft.com/office/drawing/2014/main" id="{BE75A8AE-BBC6-49A8-93E6-F798714750CB}"/>
+                <a16:creationId xmlns:a16="http://schemas.microsoft.com/office/drawing/2014/main" id="{3381C442-C87B-4D28-BC92-72E036F23430}"/>
               </a:ext>
             </a:extLst>
           </p:cNvPr>
@@ -5034,7 +5034,7 @@
           <p:cNvPr id="16" name="">
             <a:extLst xmlns:a="http://schemas.openxmlformats.org/drawingml/2006/main">
               <a:ext uri="{FF2B5EF4-FFF2-40B4-BE49-F238E27FC236}">
-                <a16:creationId xmlns:a16="http://schemas.microsoft.com/office/drawing/2014/main" id="{86E50968-B448-482F-8EE0-A8A8D4E50C63}"/>
+                <a16:creationId xmlns:a16="http://schemas.microsoft.com/office/drawing/2014/main" id="{9316638A-600F-4680-930F-CE9CFEF6CBFB}"/>
               </a:ext>
             </a:extLst>
           </p:cNvPr>
@@ -5091,7 +5091,7 @@
           <p:cNvPr id="17" name="">
             <a:extLst xmlns:a="http://schemas.openxmlformats.org/drawingml/2006/main">
               <a:ext uri="{FF2B5EF4-FFF2-40B4-BE49-F238E27FC236}">
-                <a16:creationId xmlns:a16="http://schemas.microsoft.com/office/drawing/2014/main" id="{DDAD44CC-6018-4D47-A9C4-9DEE01FD4F87}"/>
+                <a16:creationId xmlns:a16="http://schemas.microsoft.com/office/drawing/2014/main" id="{0B5294B6-495A-4C54-8706-8F71D2414326}"/>
               </a:ext>
             </a:extLst>
           </p:cNvPr>
@@ -5148,7 +5148,7 @@
           <p:cNvPr id="18" name="">
             <a:extLst xmlns:a="http://schemas.openxmlformats.org/drawingml/2006/main">
               <a:ext uri="{FF2B5EF4-FFF2-40B4-BE49-F238E27FC236}">
-                <a16:creationId xmlns:a16="http://schemas.microsoft.com/office/drawing/2014/main" id="{49BC91AF-687F-4F94-B33A-F477CD609E0C}"/>
+                <a16:creationId xmlns:a16="http://schemas.microsoft.com/office/drawing/2014/main" id="{01478441-E422-4415-9CBF-90B307F17B17}"/>
               </a:ext>
             </a:extLst>
           </p:cNvPr>
@@ -5182,7 +5182,7 @@
           <p:cNvPr id="19" name="">
             <a:extLst xmlns:a="http://schemas.openxmlformats.org/drawingml/2006/main">
               <a:ext uri="{FF2B5EF4-FFF2-40B4-BE49-F238E27FC236}">
-                <a16:creationId xmlns:a16="http://schemas.microsoft.com/office/drawing/2014/main" id="{4994BE1D-DC5D-4ACA-B00A-A18B2FF0917D}"/>
+                <a16:creationId xmlns:a16="http://schemas.microsoft.com/office/drawing/2014/main" id="{256D7C27-3CC6-478B-8CB1-558BB87E0413}"/>
               </a:ext>
             </a:extLst>
           </p:cNvPr>
@@ -5214,7 +5214,7 @@
           <p:cNvPr id="20" name="">
             <a:extLst xmlns:a="http://schemas.openxmlformats.org/drawingml/2006/main">
               <a:ext uri="{FF2B5EF4-FFF2-40B4-BE49-F238E27FC236}">
-                <a16:creationId xmlns:a16="http://schemas.microsoft.com/office/drawing/2014/main" id="{54B8AA41-AC49-4261-AFB4-78307BB69FAF}"/>
+                <a16:creationId xmlns:a16="http://schemas.microsoft.com/office/drawing/2014/main" id="{F66C19D0-ED7B-4E2E-9677-FD26729EC0F7}"/>
               </a:ext>
             </a:extLst>
           </p:cNvPr>
@@ -5271,7 +5271,7 @@
           <p:cNvPr id="21" name="">
             <a:extLst xmlns:a="http://schemas.openxmlformats.org/drawingml/2006/main">
               <a:ext uri="{FF2B5EF4-FFF2-40B4-BE49-F238E27FC236}">
-                <a16:creationId xmlns:a16="http://schemas.microsoft.com/office/drawing/2014/main" id="{F585CF00-7D0D-4E5C-917F-225AAF4BDD39}"/>
+                <a16:creationId xmlns:a16="http://schemas.microsoft.com/office/drawing/2014/main" id="{CE6F29EA-C8E4-4435-A160-7AD17C31E6A7}"/>
               </a:ext>
             </a:extLst>
           </p:cNvPr>
@@ -5328,7 +5328,7 @@
           <p:cNvPr id="22" name="">
             <a:extLst xmlns:a="http://schemas.openxmlformats.org/drawingml/2006/main">
               <a:ext uri="{FF2B5EF4-FFF2-40B4-BE49-F238E27FC236}">
-                <a16:creationId xmlns:a16="http://schemas.microsoft.com/office/drawing/2014/main" id="{B0FF083E-2E8A-42A4-90E6-EE6A8A534CB9}"/>
+                <a16:creationId xmlns:a16="http://schemas.microsoft.com/office/drawing/2014/main" id="{725E8670-A260-46CE-8C57-4870AAD06366}"/>
               </a:ext>
             </a:extLst>
           </p:cNvPr>
@@ -5383,7 +5383,7 @@
     </p:spTree>
     <p:extLst>
       <p:ext uri="{BB962C8B-B14F-4D97-AF65-F5344CB8AC3E}">
-        <p14:creationId xmlns:p14="http://schemas.microsoft.com/office/powerpoint/2010/main" val="663925309"/>
+        <p14:creationId xmlns:p14="http://schemas.microsoft.com/office/powerpoint/2010/main" val="972772293"/>
       </p:ext>
     </p:extLst>
   </p:cSld>
@@ -5584,7 +5584,7 @@
           <p:cNvPr id="23" name="">
             <a:extLst xmlns:a="http://schemas.openxmlformats.org/drawingml/2006/main">
               <a:ext uri="{FF2B5EF4-FFF2-40B4-BE49-F238E27FC236}">
-                <a16:creationId xmlns:a16="http://schemas.microsoft.com/office/drawing/2014/main" id="{A3B4390C-C5D0-4A98-9C68-46A9EBB8624D}"/>
+                <a16:creationId xmlns:a16="http://schemas.microsoft.com/office/drawing/2014/main" id="{6DCAF005-6003-49F4-8DE2-174F5B893C17}"/>
               </a:ext>
             </a:extLst>
           </p:cNvPr>
@@ -5616,7 +5616,7 @@
           <p:cNvPr id="2" name="">
             <a:extLst xmlns:a="http://schemas.openxmlformats.org/drawingml/2006/main">
               <a:ext uri="{FF2B5EF4-FFF2-40B4-BE49-F238E27FC236}">
-                <a16:creationId xmlns:a16="http://schemas.microsoft.com/office/drawing/2014/main" id="{CA5E4085-0A16-45FB-9F99-C390C45310D8}"/>
+                <a16:creationId xmlns:a16="http://schemas.microsoft.com/office/drawing/2014/main" id="{FF93F2E7-C977-4525-9364-BEE0D49C2073}"/>
               </a:ext>
             </a:extLst>
           </p:cNvPr>
@@ -5673,7 +5673,7 @@
           <p:cNvPr id="3" name="">
             <a:extLst xmlns:a="http://schemas.openxmlformats.org/drawingml/2006/main">
               <a:ext uri="{FF2B5EF4-FFF2-40B4-BE49-F238E27FC236}">
-                <a16:creationId xmlns:a16="http://schemas.microsoft.com/office/drawing/2014/main" id="{F604D820-9B60-45EC-85E6-EEAC40D9EBCB}"/>
+                <a16:creationId xmlns:a16="http://schemas.microsoft.com/office/drawing/2014/main" id="{6FA42591-C7C8-408A-BB5E-8004E5417824}"/>
               </a:ext>
             </a:extLst>
           </p:cNvPr>
@@ -5705,7 +5705,7 @@
           <p:cNvPr id="4" name="">
             <a:extLst xmlns:a="http://schemas.openxmlformats.org/drawingml/2006/main">
               <a:ext uri="{FF2B5EF4-FFF2-40B4-BE49-F238E27FC236}">
-                <a16:creationId xmlns:a16="http://schemas.microsoft.com/office/drawing/2014/main" id="{1ECEE558-C258-4843-A19F-17571C74B4E7}"/>
+                <a16:creationId xmlns:a16="http://schemas.microsoft.com/office/drawing/2014/main" id="{4A9ED194-DB1B-43C3-BE16-E6E72904EABC}"/>
               </a:ext>
             </a:extLst>
           </p:cNvPr>
@@ -5762,7 +5762,7 @@
           <p:cNvPr id="5" name="">
             <a:extLst xmlns:a="http://schemas.openxmlformats.org/drawingml/2006/main">
               <a:ext uri="{FF2B5EF4-FFF2-40B4-BE49-F238E27FC236}">
-                <a16:creationId xmlns:a16="http://schemas.microsoft.com/office/drawing/2014/main" id="{D9C8F96F-EFA0-4797-BD8D-0F23B622C47A}"/>
+                <a16:creationId xmlns:a16="http://schemas.microsoft.com/office/drawing/2014/main" id="{A85EEF17-0AA3-4AC5-9030-7103FA5EED5B}"/>
               </a:ext>
             </a:extLst>
           </p:cNvPr>
@@ -5819,7 +5819,7 @@
           <p:cNvPr id="6" name="">
             <a:extLst xmlns:a="http://schemas.openxmlformats.org/drawingml/2006/main">
               <a:ext uri="{FF2B5EF4-FFF2-40B4-BE49-F238E27FC236}">
-                <a16:creationId xmlns:a16="http://schemas.microsoft.com/office/drawing/2014/main" id="{B2DD0440-48C1-4A10-AFA9-408D7B12DBC4}"/>
+                <a16:creationId xmlns:a16="http://schemas.microsoft.com/office/drawing/2014/main" id="{F4867E2F-6144-45A4-A880-8437F95819EA}"/>
               </a:ext>
             </a:extLst>
           </p:cNvPr>
@@ -5876,7 +5876,7 @@
           <p:cNvPr id="7" name="">
             <a:extLst xmlns:a="http://schemas.openxmlformats.org/drawingml/2006/main">
               <a:ext uri="{FF2B5EF4-FFF2-40B4-BE49-F238E27FC236}">
-                <a16:creationId xmlns:a16="http://schemas.microsoft.com/office/drawing/2014/main" id="{4E9AEA6A-5DF7-41CE-A77E-00BD6BA4ED0C}"/>
+                <a16:creationId xmlns:a16="http://schemas.microsoft.com/office/drawing/2014/main" id="{AA40A27C-3785-4876-82F7-F51A066ED2E3}"/>
               </a:ext>
             </a:extLst>
           </p:cNvPr>
@@ -5908,7 +5908,7 @@
           <p:cNvPr id="8" name="">
             <a:extLst xmlns:a="http://schemas.openxmlformats.org/drawingml/2006/main">
               <a:ext uri="{FF2B5EF4-FFF2-40B4-BE49-F238E27FC236}">
-                <a16:creationId xmlns:a16="http://schemas.microsoft.com/office/drawing/2014/main" id="{847C4E6A-2A0E-49A5-B0A8-909D02B23B76}"/>
+                <a16:creationId xmlns:a16="http://schemas.microsoft.com/office/drawing/2014/main" id="{4CB8D0AD-A10C-4B16-B358-160137188602}"/>
               </a:ext>
             </a:extLst>
           </p:cNvPr>
@@ -5965,7 +5965,7 @@
           <p:cNvPr id="9" name="">
             <a:extLst xmlns:a="http://schemas.openxmlformats.org/drawingml/2006/main">
               <a:ext uri="{FF2B5EF4-FFF2-40B4-BE49-F238E27FC236}">
-                <a16:creationId xmlns:a16="http://schemas.microsoft.com/office/drawing/2014/main" id="{497A176C-6C61-4B8F-8AAB-FA8B9DD1051E}"/>
+                <a16:creationId xmlns:a16="http://schemas.microsoft.com/office/drawing/2014/main" id="{9D273FBE-EE9C-409F-8869-F0FB57299F88}"/>
               </a:ext>
             </a:extLst>
           </p:cNvPr>
@@ -6022,7 +6022,7 @@
           <p:cNvPr id="10" name="">
             <a:extLst xmlns:a="http://schemas.openxmlformats.org/drawingml/2006/main">
               <a:ext uri="{FF2B5EF4-FFF2-40B4-BE49-F238E27FC236}">
-                <a16:creationId xmlns:a16="http://schemas.microsoft.com/office/drawing/2014/main" id="{08A4ABE7-15D2-414D-8CA4-ACA54335E7E8}"/>
+                <a16:creationId xmlns:a16="http://schemas.microsoft.com/office/drawing/2014/main" id="{40C3B293-E9A4-4A79-BACE-FCE96D32E6E7}"/>
               </a:ext>
             </a:extLst>
           </p:cNvPr>
@@ -6056,7 +6056,7 @@
           <p:cNvPr id="11" name="">
             <a:extLst xmlns:a="http://schemas.openxmlformats.org/drawingml/2006/main">
               <a:ext uri="{FF2B5EF4-FFF2-40B4-BE49-F238E27FC236}">
-                <a16:creationId xmlns:a16="http://schemas.microsoft.com/office/drawing/2014/main" id="{09BB596E-63D6-439D-BAC6-50F1CFBBF6FE}"/>
+                <a16:creationId xmlns:a16="http://schemas.microsoft.com/office/drawing/2014/main" id="{27E50135-875C-4F87-B357-DE8259D37198}"/>
               </a:ext>
             </a:extLst>
           </p:cNvPr>
@@ -6088,7 +6088,7 @@
           <p:cNvPr id="12" name="">
             <a:extLst xmlns:a="http://schemas.openxmlformats.org/drawingml/2006/main">
               <a:ext uri="{FF2B5EF4-FFF2-40B4-BE49-F238E27FC236}">
-                <a16:creationId xmlns:a16="http://schemas.microsoft.com/office/drawing/2014/main" id="{2C04ADB7-A7EF-4979-A638-12B311948847}"/>
+                <a16:creationId xmlns:a16="http://schemas.microsoft.com/office/drawing/2014/main" id="{8F02D05D-09E4-4FE6-8861-71D60400AA1D}"/>
               </a:ext>
             </a:extLst>
           </p:cNvPr>
@@ -6145,7 +6145,7 @@
           <p:cNvPr id="13" name="">
             <a:extLst xmlns:a="http://schemas.openxmlformats.org/drawingml/2006/main">
               <a:ext uri="{FF2B5EF4-FFF2-40B4-BE49-F238E27FC236}">
-                <a16:creationId xmlns:a16="http://schemas.microsoft.com/office/drawing/2014/main" id="{0C56112C-8C1E-4549-A476-D0CAE12DB139}"/>
+                <a16:creationId xmlns:a16="http://schemas.microsoft.com/office/drawing/2014/main" id="{8DB9324A-ABF2-4394-9490-5C38F77224B4}"/>
               </a:ext>
             </a:extLst>
           </p:cNvPr>
@@ -6202,7 +6202,7 @@
           <p:cNvPr id="14" name="">
             <a:extLst xmlns:a="http://schemas.openxmlformats.org/drawingml/2006/main">
               <a:ext uri="{FF2B5EF4-FFF2-40B4-BE49-F238E27FC236}">
-                <a16:creationId xmlns:a16="http://schemas.microsoft.com/office/drawing/2014/main" id="{3B1862A5-0984-45B8-A69A-C801DF978AC5}"/>
+                <a16:creationId xmlns:a16="http://schemas.microsoft.com/office/drawing/2014/main" id="{14B9D874-9F1D-4A83-A1F5-4323E50EB5F2}"/>
               </a:ext>
             </a:extLst>
           </p:cNvPr>
@@ -6236,7 +6236,7 @@
           <p:cNvPr id="15" name="">
             <a:extLst xmlns:a="http://schemas.openxmlformats.org/drawingml/2006/main">
               <a:ext uri="{FF2B5EF4-FFF2-40B4-BE49-F238E27FC236}">
-                <a16:creationId xmlns:a16="http://schemas.microsoft.com/office/drawing/2014/main" id="{89AB1A21-C7E7-490D-AAB0-F523DD745F06}"/>
+                <a16:creationId xmlns:a16="http://schemas.microsoft.com/office/drawing/2014/main" id="{54F1CED3-2BD2-4DD7-9A18-58E8F40BA90F}"/>
               </a:ext>
             </a:extLst>
           </p:cNvPr>
@@ -6268,7 +6268,7 @@
           <p:cNvPr id="16" name="">
             <a:extLst xmlns:a="http://schemas.openxmlformats.org/drawingml/2006/main">
               <a:ext uri="{FF2B5EF4-FFF2-40B4-BE49-F238E27FC236}">
-                <a16:creationId xmlns:a16="http://schemas.microsoft.com/office/drawing/2014/main" id="{8C433CEE-60FD-4C51-9F54-1140A7B65A1F}"/>
+                <a16:creationId xmlns:a16="http://schemas.microsoft.com/office/drawing/2014/main" id="{9A4F2684-0BCF-4602-99E1-94177408BA85}"/>
               </a:ext>
             </a:extLst>
           </p:cNvPr>
@@ -6325,7 +6325,7 @@
           <p:cNvPr id="17" name="">
             <a:extLst xmlns:a="http://schemas.openxmlformats.org/drawingml/2006/main">
               <a:ext uri="{FF2B5EF4-FFF2-40B4-BE49-F238E27FC236}">
-                <a16:creationId xmlns:a16="http://schemas.microsoft.com/office/drawing/2014/main" id="{0503361E-4D28-4F93-9B0F-CC52A468EC12}"/>
+                <a16:creationId xmlns:a16="http://schemas.microsoft.com/office/drawing/2014/main" id="{B292C8AF-5F12-4FB6-A1E3-4D73DF755AC6}"/>
               </a:ext>
             </a:extLst>
           </p:cNvPr>
@@ -6382,7 +6382,7 @@
           <p:cNvPr id="18" name="">
             <a:extLst xmlns:a="http://schemas.openxmlformats.org/drawingml/2006/main">
               <a:ext uri="{FF2B5EF4-FFF2-40B4-BE49-F238E27FC236}">
-                <a16:creationId xmlns:a16="http://schemas.microsoft.com/office/drawing/2014/main" id="{6521A2CE-C00C-4A1C-80E9-CEF79A4375C2}"/>
+                <a16:creationId xmlns:a16="http://schemas.microsoft.com/office/drawing/2014/main" id="{6C1369C8-F03B-411D-9D68-15E2321E5EC3}"/>
               </a:ext>
             </a:extLst>
           </p:cNvPr>
@@ -6416,7 +6416,7 @@
           <p:cNvPr id="19" name="">
             <a:extLst xmlns:a="http://schemas.openxmlformats.org/drawingml/2006/main">
               <a:ext uri="{FF2B5EF4-FFF2-40B4-BE49-F238E27FC236}">
-                <a16:creationId xmlns:a16="http://schemas.microsoft.com/office/drawing/2014/main" id="{0CFA9DE5-B07F-4E52-A919-F1DB204D9A71}"/>
+                <a16:creationId xmlns:a16="http://schemas.microsoft.com/office/drawing/2014/main" id="{37BAA428-1EEE-47FA-B25D-BF23917EBED7}"/>
               </a:ext>
             </a:extLst>
           </p:cNvPr>
@@ -6448,7 +6448,7 @@
           <p:cNvPr id="20" name="">
             <a:extLst xmlns:a="http://schemas.openxmlformats.org/drawingml/2006/main">
               <a:ext uri="{FF2B5EF4-FFF2-40B4-BE49-F238E27FC236}">
-                <a16:creationId xmlns:a16="http://schemas.microsoft.com/office/drawing/2014/main" id="{6CBEA3C7-DAD0-4801-8EAC-DFF572CBF3F5}"/>
+                <a16:creationId xmlns:a16="http://schemas.microsoft.com/office/drawing/2014/main" id="{1AECBEC0-7786-4EB6-B9A5-829BA73F1C7A}"/>
               </a:ext>
             </a:extLst>
           </p:cNvPr>
@@ -6505,7 +6505,7 @@
           <p:cNvPr id="21" name="">
             <a:extLst xmlns:a="http://schemas.openxmlformats.org/drawingml/2006/main">
               <a:ext uri="{FF2B5EF4-FFF2-40B4-BE49-F238E27FC236}">
-                <a16:creationId xmlns:a16="http://schemas.microsoft.com/office/drawing/2014/main" id="{2902BEB0-5F57-423B-80A3-69ECB84E9E99}"/>
+                <a16:creationId xmlns:a16="http://schemas.microsoft.com/office/drawing/2014/main" id="{F746BCC6-3A4F-4F99-B399-5E865E87D142}"/>
               </a:ext>
             </a:extLst>
           </p:cNvPr>
@@ -6562,7 +6562,7 @@
           <p:cNvPr id="22" name="">
             <a:extLst xmlns:a="http://schemas.openxmlformats.org/drawingml/2006/main">
               <a:ext uri="{FF2B5EF4-FFF2-40B4-BE49-F238E27FC236}">
-                <a16:creationId xmlns:a16="http://schemas.microsoft.com/office/drawing/2014/main" id="{5A9485A7-8E0A-4342-B310-C41B46CB5283}"/>
+                <a16:creationId xmlns:a16="http://schemas.microsoft.com/office/drawing/2014/main" id="{A3CDEA5F-9A34-4047-B4DE-10DC7AB16A4D}"/>
               </a:ext>
             </a:extLst>
           </p:cNvPr>
@@ -6617,7 +6617,7 @@
     </p:spTree>
     <p:extLst>
       <p:ext uri="{BB962C8B-B14F-4D97-AF65-F5344CB8AC3E}">
-        <p14:creationId xmlns:p14="http://schemas.microsoft.com/office/powerpoint/2010/main" val="2040011307"/>
+        <p14:creationId xmlns:p14="http://schemas.microsoft.com/office/powerpoint/2010/main" val="2042701932"/>
       </p:ext>
     </p:extLst>
   </p:cSld>
@@ -6818,7 +6818,7 @@
           <p:cNvPr id="16" name="">
             <a:extLst xmlns:a="http://schemas.openxmlformats.org/drawingml/2006/main">
               <a:ext uri="{FF2B5EF4-FFF2-40B4-BE49-F238E27FC236}">
-                <a16:creationId xmlns:a16="http://schemas.microsoft.com/office/drawing/2014/main" id="{24E276D3-DE41-4340-9EC4-006BD0C7022B}"/>
+                <a16:creationId xmlns:a16="http://schemas.microsoft.com/office/drawing/2014/main" id="{4AC4D725-5080-4E50-8D35-A76DCD4BD68B}"/>
               </a:ext>
             </a:extLst>
           </p:cNvPr>
@@ -6850,7 +6850,7 @@
           <p:cNvPr id="2" name="">
             <a:extLst xmlns:a="http://schemas.openxmlformats.org/drawingml/2006/main">
               <a:ext uri="{FF2B5EF4-FFF2-40B4-BE49-F238E27FC236}">
-                <a16:creationId xmlns:a16="http://schemas.microsoft.com/office/drawing/2014/main" id="{A1529F47-6C17-4C7C-A414-04EFEB555F10}"/>
+                <a16:creationId xmlns:a16="http://schemas.microsoft.com/office/drawing/2014/main" id="{286D28C1-85FE-4853-B8D8-BED3E24493B8}"/>
               </a:ext>
             </a:extLst>
           </p:cNvPr>
@@ -6907,7 +6907,7 @@
           <p:cNvPr id="3" name="">
             <a:extLst xmlns:a="http://schemas.openxmlformats.org/drawingml/2006/main">
               <a:ext uri="{FF2B5EF4-FFF2-40B4-BE49-F238E27FC236}">
-                <a16:creationId xmlns:a16="http://schemas.microsoft.com/office/drawing/2014/main" id="{AC500CE8-BA21-4528-8A9B-4F7EAED20FBD}"/>
+                <a16:creationId xmlns:a16="http://schemas.microsoft.com/office/drawing/2014/main" id="{D8BE8109-59C3-418B-A7F6-73C98AC2A81D}"/>
               </a:ext>
             </a:extLst>
           </p:cNvPr>
@@ -6939,7 +6939,7 @@
           <p:cNvPr id="4" name="">
             <a:extLst xmlns:a="http://schemas.openxmlformats.org/drawingml/2006/main">
               <a:ext uri="{FF2B5EF4-FFF2-40B4-BE49-F238E27FC236}">
-                <a16:creationId xmlns:a16="http://schemas.microsoft.com/office/drawing/2014/main" id="{7E299C07-98DC-4CC0-B35B-CEC4404BD434}"/>
+                <a16:creationId xmlns:a16="http://schemas.microsoft.com/office/drawing/2014/main" id="{058912E7-9FBE-479D-8800-EF26A96ED23D}"/>
               </a:ext>
             </a:extLst>
           </p:cNvPr>
@@ -6996,7 +6996,7 @@
           <p:cNvPr id="5" name="">
             <a:extLst xmlns:a="http://schemas.openxmlformats.org/drawingml/2006/main">
               <a:ext uri="{FF2B5EF4-FFF2-40B4-BE49-F238E27FC236}">
-                <a16:creationId xmlns:a16="http://schemas.microsoft.com/office/drawing/2014/main" id="{1414A63F-2509-4EFA-9C18-F96DA2FBAD2E}"/>
+                <a16:creationId xmlns:a16="http://schemas.microsoft.com/office/drawing/2014/main" id="{97E96357-8403-4B41-B917-026F9B9DE6F4}"/>
               </a:ext>
             </a:extLst>
           </p:cNvPr>
@@ -7053,7 +7053,7 @@
           <p:cNvPr id="6" name="">
             <a:extLst xmlns:a="http://schemas.openxmlformats.org/drawingml/2006/main">
               <a:ext uri="{FF2B5EF4-FFF2-40B4-BE49-F238E27FC236}">
-                <a16:creationId xmlns:a16="http://schemas.microsoft.com/office/drawing/2014/main" id="{4CD2D120-8828-4A09-BAE3-E07831526A19}"/>
+                <a16:creationId xmlns:a16="http://schemas.microsoft.com/office/drawing/2014/main" id="{91981249-FD34-4A57-9065-5081160CB963}"/>
               </a:ext>
             </a:extLst>
           </p:cNvPr>
@@ -7110,7 +7110,7 @@
           <p:cNvPr id="7" name="">
             <a:extLst xmlns:a="http://schemas.openxmlformats.org/drawingml/2006/main">
               <a:ext uri="{FF2B5EF4-FFF2-40B4-BE49-F238E27FC236}">
-                <a16:creationId xmlns:a16="http://schemas.microsoft.com/office/drawing/2014/main" id="{0488CDDE-2E7F-4BE3-A92C-0DF3433621B4}"/>
+                <a16:creationId xmlns:a16="http://schemas.microsoft.com/office/drawing/2014/main" id="{F97E2498-6C57-4709-A1D7-3ACCA7D786D0}"/>
               </a:ext>
             </a:extLst>
           </p:cNvPr>
@@ -7142,7 +7142,7 @@
           <p:cNvPr id="8" name="">
             <a:extLst xmlns:a="http://schemas.openxmlformats.org/drawingml/2006/main">
               <a:ext uri="{FF2B5EF4-FFF2-40B4-BE49-F238E27FC236}">
-                <a16:creationId xmlns:a16="http://schemas.microsoft.com/office/drawing/2014/main" id="{E71F77E6-3E9D-43AF-A470-27A75E833962}"/>
+                <a16:creationId xmlns:a16="http://schemas.microsoft.com/office/drawing/2014/main" id="{3D0DDCB0-E797-4087-B3FC-10B25E05F212}"/>
               </a:ext>
             </a:extLst>
           </p:cNvPr>
@@ -7199,7 +7199,7 @@
           <p:cNvPr id="9" name="">
             <a:extLst xmlns:a="http://schemas.openxmlformats.org/drawingml/2006/main">
               <a:ext uri="{FF2B5EF4-FFF2-40B4-BE49-F238E27FC236}">
-                <a16:creationId xmlns:a16="http://schemas.microsoft.com/office/drawing/2014/main" id="{983EF530-71A9-4934-91A9-466D93B946AA}"/>
+                <a16:creationId xmlns:a16="http://schemas.microsoft.com/office/drawing/2014/main" id="{4070CC29-4D75-4BDC-B28C-356A6C49CCA0}"/>
               </a:ext>
             </a:extLst>
           </p:cNvPr>
@@ -7256,7 +7256,7 @@
           <p:cNvPr id="10" name="">
             <a:extLst xmlns:a="http://schemas.openxmlformats.org/drawingml/2006/main">
               <a:ext uri="{FF2B5EF4-FFF2-40B4-BE49-F238E27FC236}">
-                <a16:creationId xmlns:a16="http://schemas.microsoft.com/office/drawing/2014/main" id="{5629B354-9E59-4962-B40A-29EFED80E89E}"/>
+                <a16:creationId xmlns:a16="http://schemas.microsoft.com/office/drawing/2014/main" id="{20AA2EBB-B49D-4C2B-A225-A3170CBB1CA2}"/>
               </a:ext>
             </a:extLst>
           </p:cNvPr>
@@ -7313,7 +7313,7 @@
           <p:cNvPr id="11" name="">
             <a:extLst xmlns:a="http://schemas.openxmlformats.org/drawingml/2006/main">
               <a:ext uri="{FF2B5EF4-FFF2-40B4-BE49-F238E27FC236}">
-                <a16:creationId xmlns:a16="http://schemas.microsoft.com/office/drawing/2014/main" id="{24B06D3F-5CA6-449C-AB7A-7E1B7F8B8099}"/>
+                <a16:creationId xmlns:a16="http://schemas.microsoft.com/office/drawing/2014/main" id="{D2205004-288F-49B2-B376-4F29DD0A04D9}"/>
               </a:ext>
             </a:extLst>
           </p:cNvPr>
@@ -7345,7 +7345,7 @@
           <p:cNvPr id="12" name="">
             <a:extLst xmlns:a="http://schemas.openxmlformats.org/drawingml/2006/main">
               <a:ext uri="{FF2B5EF4-FFF2-40B4-BE49-F238E27FC236}">
-                <a16:creationId xmlns:a16="http://schemas.microsoft.com/office/drawing/2014/main" id="{8791F549-67CC-4E32-B075-0D5FAAECD9D2}"/>
+                <a16:creationId xmlns:a16="http://schemas.microsoft.com/office/drawing/2014/main" id="{CF33EFB7-A7F5-4FF0-BF8A-4F621BB48FD6}"/>
               </a:ext>
             </a:extLst>
           </p:cNvPr>
@@ -7402,7 +7402,7 @@
           <p:cNvPr id="13" name="">
             <a:extLst xmlns:a="http://schemas.openxmlformats.org/drawingml/2006/main">
               <a:ext uri="{FF2B5EF4-FFF2-40B4-BE49-F238E27FC236}">
-                <a16:creationId xmlns:a16="http://schemas.microsoft.com/office/drawing/2014/main" id="{54CF8A71-0200-4BB8-9F6C-93FD0515E600}"/>
+                <a16:creationId xmlns:a16="http://schemas.microsoft.com/office/drawing/2014/main" id="{4DD3B3DC-877F-4C0C-AD15-E53B91627432}"/>
               </a:ext>
             </a:extLst>
           </p:cNvPr>
@@ -7459,7 +7459,7 @@
           <p:cNvPr id="14" name="">
             <a:extLst xmlns:a="http://schemas.openxmlformats.org/drawingml/2006/main">
               <a:ext uri="{FF2B5EF4-FFF2-40B4-BE49-F238E27FC236}">
-                <a16:creationId xmlns:a16="http://schemas.microsoft.com/office/drawing/2014/main" id="{CE5BFA3A-23B5-4B6A-AFC3-364FBA0AE6B6}"/>
+                <a16:creationId xmlns:a16="http://schemas.microsoft.com/office/drawing/2014/main" id="{8E48D9DB-15BF-42C3-B598-2FD8658A1D15}"/>
               </a:ext>
             </a:extLst>
           </p:cNvPr>
@@ -7516,7 +7516,7 @@
           <p:cNvPr id="15" name="">
             <a:extLst xmlns:a="http://schemas.openxmlformats.org/drawingml/2006/main">
               <a:ext uri="{FF2B5EF4-FFF2-40B4-BE49-F238E27FC236}">
-                <a16:creationId xmlns:a16="http://schemas.microsoft.com/office/drawing/2014/main" id="{F0996375-C26C-4DA4-BF30-098F02468EF7}"/>
+                <a16:creationId xmlns:a16="http://schemas.microsoft.com/office/drawing/2014/main" id="{BC86AB21-0A16-4B03-AA05-923223B8F245}"/>
               </a:ext>
             </a:extLst>
           </p:cNvPr>
@@ -7571,7 +7571,7 @@
     </p:spTree>
     <p:extLst>
       <p:ext uri="{BB962C8B-B14F-4D97-AF65-F5344CB8AC3E}">
-        <p14:creationId xmlns:p14="http://schemas.microsoft.com/office/powerpoint/2010/main" val="787095449"/>
+        <p14:creationId xmlns:p14="http://schemas.microsoft.com/office/powerpoint/2010/main" val="1326796688"/>
       </p:ext>
     </p:extLst>
   </p:cSld>
@@ -7772,7 +7772,7 @@
           <p:cNvPr id="23" name="">
             <a:extLst xmlns:a="http://schemas.openxmlformats.org/drawingml/2006/main">
               <a:ext uri="{FF2B5EF4-FFF2-40B4-BE49-F238E27FC236}">
-                <a16:creationId xmlns:a16="http://schemas.microsoft.com/office/drawing/2014/main" id="{A512E00D-1AC4-4120-8D83-EC4497E671CC}"/>
+                <a16:creationId xmlns:a16="http://schemas.microsoft.com/office/drawing/2014/main" id="{7561C167-CE0D-4435-BD73-3AAD04B3242C}"/>
               </a:ext>
             </a:extLst>
           </p:cNvPr>
@@ -7804,7 +7804,7 @@
           <p:cNvPr id="2" name="">
             <a:extLst xmlns:a="http://schemas.openxmlformats.org/drawingml/2006/main">
               <a:ext uri="{FF2B5EF4-FFF2-40B4-BE49-F238E27FC236}">
-                <a16:creationId xmlns:a16="http://schemas.microsoft.com/office/drawing/2014/main" id="{FE57DE2A-15C0-4392-AA36-38BD3BEA7194}"/>
+                <a16:creationId xmlns:a16="http://schemas.microsoft.com/office/drawing/2014/main" id="{F5FB4818-91A4-45EE-A0CD-C3986B869486}"/>
               </a:ext>
             </a:extLst>
           </p:cNvPr>
@@ -7861,7 +7861,7 @@
           <p:cNvPr id="3" name="">
             <a:extLst xmlns:a="http://schemas.openxmlformats.org/drawingml/2006/main">
               <a:ext uri="{FF2B5EF4-FFF2-40B4-BE49-F238E27FC236}">
-                <a16:creationId xmlns:a16="http://schemas.microsoft.com/office/drawing/2014/main" id="{1CFD08F1-173F-4488-8609-48E90048AD18}"/>
+                <a16:creationId xmlns:a16="http://schemas.microsoft.com/office/drawing/2014/main" id="{FDF3EBFC-8C1F-4347-BCEC-3C94C3E7F231}"/>
               </a:ext>
             </a:extLst>
           </p:cNvPr>
@@ -7893,7 +7893,7 @@
           <p:cNvPr id="4" name="">
             <a:extLst xmlns:a="http://schemas.openxmlformats.org/drawingml/2006/main">
               <a:ext uri="{FF2B5EF4-FFF2-40B4-BE49-F238E27FC236}">
-                <a16:creationId xmlns:a16="http://schemas.microsoft.com/office/drawing/2014/main" id="{65842783-1A01-4B1C-BFF7-615AC7BC8C08}"/>
+                <a16:creationId xmlns:a16="http://schemas.microsoft.com/office/drawing/2014/main" id="{AB60AF61-7499-4A8E-AC69-C9ECD3F04526}"/>
               </a:ext>
             </a:extLst>
           </p:cNvPr>
@@ -7950,7 +7950,7 @@
           <p:cNvPr id="5" name="">
             <a:extLst xmlns:a="http://schemas.openxmlformats.org/drawingml/2006/main">
               <a:ext uri="{FF2B5EF4-FFF2-40B4-BE49-F238E27FC236}">
-                <a16:creationId xmlns:a16="http://schemas.microsoft.com/office/drawing/2014/main" id="{19060F04-DA2F-4F2A-BF35-4F774B390F18}"/>
+                <a16:creationId xmlns:a16="http://schemas.microsoft.com/office/drawing/2014/main" id="{564CA5D5-3412-41F7-90B8-9257B77221A9}"/>
               </a:ext>
             </a:extLst>
           </p:cNvPr>
@@ -8007,7 +8007,7 @@
           <p:cNvPr id="6" name="">
             <a:extLst xmlns:a="http://schemas.openxmlformats.org/drawingml/2006/main">
               <a:ext uri="{FF2B5EF4-FFF2-40B4-BE49-F238E27FC236}">
-                <a16:creationId xmlns:a16="http://schemas.microsoft.com/office/drawing/2014/main" id="{F87B0D3B-9302-43C3-8F1C-32CD16E6CC2E}"/>
+                <a16:creationId xmlns:a16="http://schemas.microsoft.com/office/drawing/2014/main" id="{AC134621-794A-4B77-BDD5-4B954FDD4AD8}"/>
               </a:ext>
             </a:extLst>
           </p:cNvPr>
@@ -8064,7 +8064,7 @@
           <p:cNvPr id="7" name="">
             <a:extLst xmlns:a="http://schemas.openxmlformats.org/drawingml/2006/main">
               <a:ext uri="{FF2B5EF4-FFF2-40B4-BE49-F238E27FC236}">
-                <a16:creationId xmlns:a16="http://schemas.microsoft.com/office/drawing/2014/main" id="{2FE521F1-EE86-4582-9F4C-C2A20AFBAF95}"/>
+                <a16:creationId xmlns:a16="http://schemas.microsoft.com/office/drawing/2014/main" id="{8784C11C-4C6A-4822-AAF0-B09B93A1EDA0}"/>
               </a:ext>
             </a:extLst>
           </p:cNvPr>
@@ -8096,7 +8096,7 @@
           <p:cNvPr id="8" name="">
             <a:extLst xmlns:a="http://schemas.openxmlformats.org/drawingml/2006/main">
               <a:ext uri="{FF2B5EF4-FFF2-40B4-BE49-F238E27FC236}">
-                <a16:creationId xmlns:a16="http://schemas.microsoft.com/office/drawing/2014/main" id="{70812C1F-F07E-422C-9D63-15A276AC1BB0}"/>
+                <a16:creationId xmlns:a16="http://schemas.microsoft.com/office/drawing/2014/main" id="{CD54A468-D704-4E32-9297-7F9DF489A3EC}"/>
               </a:ext>
             </a:extLst>
           </p:cNvPr>
@@ -8153,7 +8153,7 @@
           <p:cNvPr id="9" name="">
             <a:extLst xmlns:a="http://schemas.openxmlformats.org/drawingml/2006/main">
               <a:ext uri="{FF2B5EF4-FFF2-40B4-BE49-F238E27FC236}">
-                <a16:creationId xmlns:a16="http://schemas.microsoft.com/office/drawing/2014/main" id="{55EB82DD-288A-4357-A85A-47F60318706F}"/>
+                <a16:creationId xmlns:a16="http://schemas.microsoft.com/office/drawing/2014/main" id="{6C84533C-B214-42E5-88CA-92744E937552}"/>
               </a:ext>
             </a:extLst>
           </p:cNvPr>
@@ -8210,19 +8210,19 @@
           <p:cNvPr id="10" name="">
             <a:extLst xmlns:a="http://schemas.openxmlformats.org/drawingml/2006/main">
               <a:ext uri="{FF2B5EF4-FFF2-40B4-BE49-F238E27FC236}">
-                <a16:creationId xmlns:a16="http://schemas.microsoft.com/office/drawing/2014/main" id="{472B535B-E5D0-44EB-B86E-C3531BC4877C}"/>
-              </a:ext>
-            </a:extLst>
-          </p:cNvPr>
-          <p:cNvSpPr>
-            <a:spLocks xmlns:a="http://schemas.openxmlformats.org/drawingml/2006/main" noGrp="1"/>
-          </p:cNvSpPr>
-          <p:nvPr/>
-        </p:nvSpPr>
-        <p:spPr>
-          <a:xfrm xmlns:a="http://schemas.openxmlformats.org/drawingml/2006/main">
-            <a:off x="914400" y="1257300"/>
-            <a:ext cx="10363200" cy="781050"/>
+                <a16:creationId xmlns:a16="http://schemas.microsoft.com/office/drawing/2014/main" id="{71E79E0E-8C99-4E8F-ABBC-290723E9BC05}"/>
+              </a:ext>
+            </a:extLst>
+          </p:cNvPr>
+          <p:cNvSpPr>
+            <a:spLocks xmlns:a="http://schemas.openxmlformats.org/drawingml/2006/main" noGrp="1"/>
+          </p:cNvSpPr>
+          <p:nvPr/>
+        </p:nvSpPr>
+        <p:spPr>
+          <a:xfrm xmlns:a="http://schemas.openxmlformats.org/drawingml/2006/main">
+            <a:off x="857250" y="1219200"/>
+            <a:ext cx="10477500" cy="742950"/>
           </a:xfrm>
           <a:prstGeom xmlns:a="http://schemas.openxmlformats.org/drawingml/2006/main" prst="rect">
             <a:avLst/>
@@ -8239,7 +8239,7 @@
           <a:lstStyle xmlns:a="http://schemas.openxmlformats.org/drawingml/2006/main"/>
           <a:p xmlns:a="http://schemas.openxmlformats.org/drawingml/2006/main">
             <a:pPr algn="ctr">
-              <a:defRPr sz="2175" b="1">
+              <a:defRPr sz="2100" b="1">
                 <a:solidFill>
                   <a:srgbClr val="17253A"/>
                 </a:solidFill>
@@ -8249,7 +8249,7 @@
               </a:defRPr>
             </a:pPr>
             <a:r>
-              <a:rPr sz="2175" b="1">
+              <a:rPr sz="2100" b="1">
                 <a:solidFill>
                   <a:srgbClr val="17253A"/>
                 </a:solidFill>
@@ -8267,28 +8267,30 @@
           <p:cNvPr id="11" name="">
             <a:extLst xmlns:a="http://schemas.openxmlformats.org/drawingml/2006/main">
               <a:ext uri="{FF2B5EF4-FFF2-40B4-BE49-F238E27FC236}">
-                <a16:creationId xmlns:a16="http://schemas.microsoft.com/office/drawing/2014/main" id="{2E9CCEA4-020A-47E0-83A1-A6CA06D7230A}"/>
-              </a:ext>
-            </a:extLst>
-          </p:cNvPr>
-          <p:cNvSpPr>
-            <a:spLocks xmlns:a="http://schemas.openxmlformats.org/drawingml/2006/main" noGrp="1"/>
-          </p:cNvSpPr>
-          <p:nvPr/>
-        </p:nvSpPr>
-        <p:spPr>
-          <a:xfrm xmlns:a="http://schemas.openxmlformats.org/drawingml/2006/main">
-            <a:off x="1000125" y="2247900"/>
-            <a:ext cx="476250" cy="476250"/>
-          </a:xfrm>
-          <a:prstGeom xmlns:a="http://schemas.openxmlformats.org/drawingml/2006/main" prst="ellipse">
+                <a16:creationId xmlns:a16="http://schemas.microsoft.com/office/drawing/2014/main" id="{47580D57-D74C-460C-9F59-F0323EF13ACE}"/>
+              </a:ext>
+            </a:extLst>
+          </p:cNvPr>
+          <p:cNvSpPr>
+            <a:spLocks xmlns:a="http://schemas.openxmlformats.org/drawingml/2006/main" noGrp="1"/>
+          </p:cNvSpPr>
+          <p:nvPr/>
+        </p:nvSpPr>
+        <p:spPr>
+          <a:xfrm xmlns:a="http://schemas.openxmlformats.org/drawingml/2006/main">
+            <a:off x="971550" y="2124075"/>
+            <a:ext cx="38100" cy="3524250"/>
+          </a:xfrm>
+          <a:prstGeom xmlns:a="http://schemas.openxmlformats.org/drawingml/2006/main" prst="rect">
             <a:avLst/>
           </a:prstGeom>
           <a:solidFill xmlns:a="http://schemas.openxmlformats.org/drawingml/2006/main">
-            <a:srgbClr val="18324A"/>
+            <a:srgbClr val="2C6E73"/>
           </a:solidFill>
           <a:ln xmlns:a="http://schemas.openxmlformats.org/drawingml/2006/main" w="0">
-            <a:noFill/>
+            <a:solidFill>
+              <a:srgbClr val="2C6E73"/>
+            </a:solidFill>
           </a:ln>
         </p:spPr>
       </p:sp>
@@ -8297,19 +8299,19 @@
           <p:cNvPr id="12" name="">
             <a:extLst xmlns:a="http://schemas.openxmlformats.org/drawingml/2006/main">
               <a:ext uri="{FF2B5EF4-FFF2-40B4-BE49-F238E27FC236}">
-                <a16:creationId xmlns:a16="http://schemas.microsoft.com/office/drawing/2014/main" id="{9A0C698E-6557-4E29-8A3D-1CE3B2D0A84C}"/>
-              </a:ext>
-            </a:extLst>
-          </p:cNvPr>
-          <p:cNvSpPr>
-            <a:spLocks xmlns:a="http://schemas.openxmlformats.org/drawingml/2006/main" noGrp="1"/>
-          </p:cNvSpPr>
-          <p:nvPr/>
-        </p:nvSpPr>
-        <p:spPr>
-          <a:xfrm xmlns:a="http://schemas.openxmlformats.org/drawingml/2006/main">
-            <a:off x="1000125" y="2276475"/>
-            <a:ext cx="476250" cy="419100"/>
+                <a16:creationId xmlns:a16="http://schemas.microsoft.com/office/drawing/2014/main" id="{77D9DBA2-47EF-40E8-9BCA-7109A0FD0094}"/>
+              </a:ext>
+            </a:extLst>
+          </p:cNvPr>
+          <p:cNvSpPr>
+            <a:spLocks xmlns:a="http://schemas.openxmlformats.org/drawingml/2006/main" noGrp="1"/>
+          </p:cNvSpPr>
+          <p:nvPr/>
+        </p:nvSpPr>
+        <p:spPr>
+          <a:xfrm xmlns:a="http://schemas.openxmlformats.org/drawingml/2006/main">
+            <a:off x="1162050" y="2200275"/>
+            <a:ext cx="400050" cy="400050"/>
           </a:xfrm>
           <a:prstGeom xmlns:a="http://schemas.openxmlformats.org/drawingml/2006/main" prst="rect">
             <a:avLst/>
@@ -8326,9 +8328,9 @@
           <a:lstStyle xmlns:a="http://schemas.openxmlformats.org/drawingml/2006/main"/>
           <a:p xmlns:a="http://schemas.openxmlformats.org/drawingml/2006/main">
             <a:pPr algn="ctr">
-              <a:defRPr sz="1350" b="1">
-                <a:solidFill>
-                  <a:srgbClr val="FFFFFF"/>
+              <a:defRPr sz="1125" b="1">
+                <a:solidFill>
+                  <a:srgbClr val="2C6E73"/>
                 </a:solidFill>
                 <a:latin typeface="Arial"/>
                 <a:ea typeface="Arial"/>
@@ -8336,9 +8338,9 @@
               </a:defRPr>
             </a:pPr>
             <a:r>
-              <a:rPr sz="1350" b="1">
-                <a:solidFill>
-                  <a:srgbClr val="FFFFFF"/>
+              <a:rPr sz="1125" b="1">
+                <a:solidFill>
+                  <a:srgbClr val="2C6E73"/>
                 </a:solidFill>
                 <a:latin typeface="Arial"/>
                 <a:ea typeface="Arial"/>
@@ -8354,19 +8356,19 @@
           <p:cNvPr id="13" name="">
             <a:extLst xmlns:a="http://schemas.openxmlformats.org/drawingml/2006/main">
               <a:ext uri="{FF2B5EF4-FFF2-40B4-BE49-F238E27FC236}">
-                <a16:creationId xmlns:a16="http://schemas.microsoft.com/office/drawing/2014/main" id="{E7B209E7-B9F1-4D6F-A27F-FDAB3AC8A0CD}"/>
-              </a:ext>
-            </a:extLst>
-          </p:cNvPr>
-          <p:cNvSpPr>
-            <a:spLocks xmlns:a="http://schemas.openxmlformats.org/drawingml/2006/main" noGrp="1"/>
-          </p:cNvSpPr>
-          <p:nvPr/>
-        </p:nvSpPr>
-        <p:spPr>
-          <a:xfrm xmlns:a="http://schemas.openxmlformats.org/drawingml/2006/main">
-            <a:off x="1714500" y="2181225"/>
-            <a:ext cx="9429750" cy="609600"/>
+                <a16:creationId xmlns:a16="http://schemas.microsoft.com/office/drawing/2014/main" id="{3BA16097-2FAC-46F5-B23B-B5512BCC0B19}"/>
+              </a:ext>
+            </a:extLst>
+          </p:cNvPr>
+          <p:cNvSpPr>
+            <a:spLocks xmlns:a="http://schemas.openxmlformats.org/drawingml/2006/main" noGrp="1"/>
+          </p:cNvSpPr>
+          <p:nvPr/>
+        </p:nvSpPr>
+        <p:spPr>
+          <a:xfrm xmlns:a="http://schemas.openxmlformats.org/drawingml/2006/main">
+            <a:off x="1714500" y="2114550"/>
+            <a:ext cx="9525000" cy="809625"/>
           </a:xfrm>
           <a:prstGeom xmlns:a="http://schemas.openxmlformats.org/drawingml/2006/main" prst="rect">
             <a:avLst/>
@@ -8383,7 +8385,7 @@
           <a:lstStyle xmlns:a="http://schemas.openxmlformats.org/drawingml/2006/main"/>
           <a:p xmlns:a="http://schemas.openxmlformats.org/drawingml/2006/main">
             <a:pPr algn="l">
-              <a:defRPr sz="1500" b="0">
+              <a:defRPr sz="1725" b="0">
                 <a:solidFill>
                   <a:srgbClr val="17253A"/>
                 </a:solidFill>
@@ -8393,7 +8395,7 @@
               </a:defRPr>
             </a:pPr>
             <a:r>
-              <a:rPr sz="1500" b="0">
+              <a:rPr sz="1725" b="0">
                 <a:solidFill>
                   <a:srgbClr val="17253A"/>
                 </a:solidFill>
@@ -8401,7 +8403,7 @@
                 <a:ea typeface="Arial"/>
                 <a:cs typeface="Arial"/>
               </a:rPr>
-              <a:t>Identify the structure: Read the number in three-digit periods from left to right.</a:t>
+              <a:t>6,407,215</a:t>
             </a:r>
           </a:p>
         </p:txBody>
@@ -8411,28 +8413,30 @@
           <p:cNvPr id="14" name="">
             <a:extLst xmlns:a="http://schemas.openxmlformats.org/drawingml/2006/main">
               <a:ext uri="{FF2B5EF4-FFF2-40B4-BE49-F238E27FC236}">
-                <a16:creationId xmlns:a16="http://schemas.microsoft.com/office/drawing/2014/main" id="{0433B28E-A3C5-434B-A097-39449A7A3886}"/>
-              </a:ext>
-            </a:extLst>
-          </p:cNvPr>
-          <p:cNvSpPr>
-            <a:spLocks xmlns:a="http://schemas.openxmlformats.org/drawingml/2006/main" noGrp="1"/>
-          </p:cNvSpPr>
-          <p:nvPr/>
-        </p:nvSpPr>
-        <p:spPr>
-          <a:xfrm xmlns:a="http://schemas.openxmlformats.org/drawingml/2006/main">
-            <a:off x="1000125" y="2990850"/>
-            <a:ext cx="476250" cy="476250"/>
-          </a:xfrm>
-          <a:prstGeom xmlns:a="http://schemas.openxmlformats.org/drawingml/2006/main" prst="ellipse">
+                <a16:creationId xmlns:a16="http://schemas.microsoft.com/office/drawing/2014/main" id="{96B43EDA-A9D9-4705-A029-46273433A766}"/>
+              </a:ext>
+            </a:extLst>
+          </p:cNvPr>
+          <p:cNvSpPr>
+            <a:spLocks xmlns:a="http://schemas.openxmlformats.org/drawingml/2006/main" noGrp="1"/>
+          </p:cNvSpPr>
+          <p:nvPr/>
+        </p:nvSpPr>
+        <p:spPr>
+          <a:xfrm xmlns:a="http://schemas.openxmlformats.org/drawingml/2006/main">
+            <a:off x="1714500" y="2943225"/>
+            <a:ext cx="9334500" cy="9525"/>
+          </a:xfrm>
+          <a:prstGeom xmlns:a="http://schemas.openxmlformats.org/drawingml/2006/main" prst="rect">
             <a:avLst/>
           </a:prstGeom>
           <a:solidFill xmlns:a="http://schemas.openxmlformats.org/drawingml/2006/main">
-            <a:srgbClr val="2C6E73"/>
+            <a:srgbClr val="D9E0E6"/>
           </a:solidFill>
           <a:ln xmlns:a="http://schemas.openxmlformats.org/drawingml/2006/main" w="0">
-            <a:noFill/>
+            <a:solidFill>
+              <a:srgbClr val="D9E0E6"/>
+            </a:solidFill>
           </a:ln>
         </p:spPr>
       </p:sp>
@@ -8441,19 +8445,19 @@
           <p:cNvPr id="15" name="">
             <a:extLst xmlns:a="http://schemas.openxmlformats.org/drawingml/2006/main">
               <a:ext uri="{FF2B5EF4-FFF2-40B4-BE49-F238E27FC236}">
-                <a16:creationId xmlns:a16="http://schemas.microsoft.com/office/drawing/2014/main" id="{03F11B11-64F0-434D-8FC1-D01B10724A27}"/>
-              </a:ext>
-            </a:extLst>
-          </p:cNvPr>
-          <p:cNvSpPr>
-            <a:spLocks xmlns:a="http://schemas.openxmlformats.org/drawingml/2006/main" noGrp="1"/>
-          </p:cNvSpPr>
-          <p:nvPr/>
-        </p:nvSpPr>
-        <p:spPr>
-          <a:xfrm xmlns:a="http://schemas.openxmlformats.org/drawingml/2006/main">
-            <a:off x="1000125" y="3019425"/>
-            <a:ext cx="476250" cy="419100"/>
+                <a16:creationId xmlns:a16="http://schemas.microsoft.com/office/drawing/2014/main" id="{3644CC29-F2AF-4A3D-A24C-231E4F57DF1D}"/>
+              </a:ext>
+            </a:extLst>
+          </p:cNvPr>
+          <p:cNvSpPr>
+            <a:spLocks xmlns:a="http://schemas.openxmlformats.org/drawingml/2006/main" noGrp="1"/>
+          </p:cNvSpPr>
+          <p:nvPr/>
+        </p:nvSpPr>
+        <p:spPr>
+          <a:xfrm xmlns:a="http://schemas.openxmlformats.org/drawingml/2006/main">
+            <a:off x="1162050" y="3076575"/>
+            <a:ext cx="400050" cy="400050"/>
           </a:xfrm>
           <a:prstGeom xmlns:a="http://schemas.openxmlformats.org/drawingml/2006/main" prst="rect">
             <a:avLst/>
@@ -8470,9 +8474,9 @@
           <a:lstStyle xmlns:a="http://schemas.openxmlformats.org/drawingml/2006/main"/>
           <a:p xmlns:a="http://schemas.openxmlformats.org/drawingml/2006/main">
             <a:pPr algn="ctr">
-              <a:defRPr sz="1350" b="1">
-                <a:solidFill>
-                  <a:srgbClr val="FFFFFF"/>
+              <a:defRPr sz="1125" b="1">
+                <a:solidFill>
+                  <a:srgbClr val="2C6E73"/>
                 </a:solidFill>
                 <a:latin typeface="Arial"/>
                 <a:ea typeface="Arial"/>
@@ -8480,9 +8484,9 @@
               </a:defRPr>
             </a:pPr>
             <a:r>
-              <a:rPr sz="1350" b="1">
-                <a:solidFill>
-                  <a:srgbClr val="FFFFFF"/>
+              <a:rPr sz="1125" b="1">
+                <a:solidFill>
+                  <a:srgbClr val="2C6E73"/>
                 </a:solidFill>
                 <a:latin typeface="Arial"/>
                 <a:ea typeface="Arial"/>
@@ -8498,19 +8502,19 @@
           <p:cNvPr id="16" name="">
             <a:extLst xmlns:a="http://schemas.openxmlformats.org/drawingml/2006/main">
               <a:ext uri="{FF2B5EF4-FFF2-40B4-BE49-F238E27FC236}">
-                <a16:creationId xmlns:a16="http://schemas.microsoft.com/office/drawing/2014/main" id="{BDE0CAFC-D0B7-4239-A458-604B59C52424}"/>
-              </a:ext>
-            </a:extLst>
-          </p:cNvPr>
-          <p:cNvSpPr>
-            <a:spLocks xmlns:a="http://schemas.openxmlformats.org/drawingml/2006/main" noGrp="1"/>
-          </p:cNvSpPr>
-          <p:nvPr/>
-        </p:nvSpPr>
-        <p:spPr>
-          <a:xfrm xmlns:a="http://schemas.openxmlformats.org/drawingml/2006/main">
-            <a:off x="1714500" y="2924175"/>
-            <a:ext cx="9429750" cy="609600"/>
+                <a16:creationId xmlns:a16="http://schemas.microsoft.com/office/drawing/2014/main" id="{CBBE47F5-994C-4B86-8F09-AE09525B0023}"/>
+              </a:ext>
+            </a:extLst>
+          </p:cNvPr>
+          <p:cNvSpPr>
+            <a:spLocks xmlns:a="http://schemas.openxmlformats.org/drawingml/2006/main" noGrp="1"/>
+          </p:cNvSpPr>
+          <p:nvPr/>
+        </p:nvSpPr>
+        <p:spPr>
+          <a:xfrm xmlns:a="http://schemas.openxmlformats.org/drawingml/2006/main">
+            <a:off x="1714500" y="2990850"/>
+            <a:ext cx="9525000" cy="809625"/>
           </a:xfrm>
           <a:prstGeom xmlns:a="http://schemas.openxmlformats.org/drawingml/2006/main" prst="rect">
             <a:avLst/>
@@ -8527,7 +8531,7 @@
           <a:lstStyle xmlns:a="http://schemas.openxmlformats.org/drawingml/2006/main"/>
           <a:p xmlns:a="http://schemas.openxmlformats.org/drawingml/2006/main">
             <a:pPr algn="l">
-              <a:defRPr sz="1500" b="0">
+              <a:defRPr sz="1725" b="0">
                 <a:solidFill>
                   <a:srgbClr val="17253A"/>
                 </a:solidFill>
@@ -8537,7 +8541,7 @@
               </a:defRPr>
             </a:pPr>
             <a:r>
-              <a:rPr sz="1500" b="0">
+              <a:rPr sz="1725" b="0">
                 <a:solidFill>
                   <a:srgbClr val="17253A"/>
                 </a:solidFill>
@@ -8545,7 +8549,7 @@
                 <a:ea typeface="Arial"/>
                 <a:cs typeface="Arial"/>
               </a:rPr>
-              <a:t>Set up the method: Record each digit in the correct place-value column.</a:t>
+              <a:t>6,000,000 + 400,000 + 7,000 + 200 + 10 + 5</a:t>
             </a:r>
           </a:p>
         </p:txBody>
@@ -8555,28 +8559,30 @@
           <p:cNvPr id="17" name="">
             <a:extLst xmlns:a="http://schemas.openxmlformats.org/drawingml/2006/main">
               <a:ext uri="{FF2B5EF4-FFF2-40B4-BE49-F238E27FC236}">
-                <a16:creationId xmlns:a16="http://schemas.microsoft.com/office/drawing/2014/main" id="{9F0E2191-93C7-44D2-8A21-84AEBFDE422C}"/>
-              </a:ext>
-            </a:extLst>
-          </p:cNvPr>
-          <p:cNvSpPr>
-            <a:spLocks xmlns:a="http://schemas.openxmlformats.org/drawingml/2006/main" noGrp="1"/>
-          </p:cNvSpPr>
-          <p:nvPr/>
-        </p:nvSpPr>
-        <p:spPr>
-          <a:xfrm xmlns:a="http://schemas.openxmlformats.org/drawingml/2006/main">
-            <a:off x="1000125" y="3733800"/>
-            <a:ext cx="476250" cy="476250"/>
-          </a:xfrm>
-          <a:prstGeom xmlns:a="http://schemas.openxmlformats.org/drawingml/2006/main" prst="ellipse">
+                <a16:creationId xmlns:a16="http://schemas.microsoft.com/office/drawing/2014/main" id="{6053BEEC-82F9-40DC-8473-5BDA8DD3279E}"/>
+              </a:ext>
+            </a:extLst>
+          </p:cNvPr>
+          <p:cNvSpPr>
+            <a:spLocks xmlns:a="http://schemas.openxmlformats.org/drawingml/2006/main" noGrp="1"/>
+          </p:cNvSpPr>
+          <p:nvPr/>
+        </p:nvSpPr>
+        <p:spPr>
+          <a:xfrm xmlns:a="http://schemas.openxmlformats.org/drawingml/2006/main">
+            <a:off x="1714500" y="3819525"/>
+            <a:ext cx="9334500" cy="9525"/>
+          </a:xfrm>
+          <a:prstGeom xmlns:a="http://schemas.openxmlformats.org/drawingml/2006/main" prst="rect">
             <a:avLst/>
           </a:prstGeom>
           <a:solidFill xmlns:a="http://schemas.openxmlformats.org/drawingml/2006/main">
-            <a:srgbClr val="2C6E73"/>
+            <a:srgbClr val="D9E0E6"/>
           </a:solidFill>
           <a:ln xmlns:a="http://schemas.openxmlformats.org/drawingml/2006/main" w="0">
-            <a:noFill/>
+            <a:solidFill>
+              <a:srgbClr val="D9E0E6"/>
+            </a:solidFill>
           </a:ln>
         </p:spPr>
       </p:sp>
@@ -8585,19 +8591,19 @@
           <p:cNvPr id="18" name="">
             <a:extLst xmlns:a="http://schemas.openxmlformats.org/drawingml/2006/main">
               <a:ext uri="{FF2B5EF4-FFF2-40B4-BE49-F238E27FC236}">
-                <a16:creationId xmlns:a16="http://schemas.microsoft.com/office/drawing/2014/main" id="{051211CC-7CB4-464C-9FE0-D6C30BC983C4}"/>
-              </a:ext>
-            </a:extLst>
-          </p:cNvPr>
-          <p:cNvSpPr>
-            <a:spLocks xmlns:a="http://schemas.openxmlformats.org/drawingml/2006/main" noGrp="1"/>
-          </p:cNvSpPr>
-          <p:nvPr/>
-        </p:nvSpPr>
-        <p:spPr>
-          <a:xfrm xmlns:a="http://schemas.openxmlformats.org/drawingml/2006/main">
-            <a:off x="1000125" y="3762375"/>
-            <a:ext cx="476250" cy="419100"/>
+                <a16:creationId xmlns:a16="http://schemas.microsoft.com/office/drawing/2014/main" id="{827C8DBE-66DE-4B5A-8B94-C6E091583A58}"/>
+              </a:ext>
+            </a:extLst>
+          </p:cNvPr>
+          <p:cNvSpPr>
+            <a:spLocks xmlns:a="http://schemas.openxmlformats.org/drawingml/2006/main" noGrp="1"/>
+          </p:cNvSpPr>
+          <p:nvPr/>
+        </p:nvSpPr>
+        <p:spPr>
+          <a:xfrm xmlns:a="http://schemas.openxmlformats.org/drawingml/2006/main">
+            <a:off x="1162050" y="3952875"/>
+            <a:ext cx="400050" cy="400050"/>
           </a:xfrm>
           <a:prstGeom xmlns:a="http://schemas.openxmlformats.org/drawingml/2006/main" prst="rect">
             <a:avLst/>
@@ -8614,9 +8620,9 @@
           <a:lstStyle xmlns:a="http://schemas.openxmlformats.org/drawingml/2006/main"/>
           <a:p xmlns:a="http://schemas.openxmlformats.org/drawingml/2006/main">
             <a:pPr algn="ctr">
-              <a:defRPr sz="1350" b="1">
-                <a:solidFill>
-                  <a:srgbClr val="FFFFFF"/>
+              <a:defRPr sz="1125" b="1">
+                <a:solidFill>
+                  <a:srgbClr val="2C6E73"/>
                 </a:solidFill>
                 <a:latin typeface="Arial"/>
                 <a:ea typeface="Arial"/>
@@ -8624,9 +8630,9 @@
               </a:defRPr>
             </a:pPr>
             <a:r>
-              <a:rPr sz="1350" b="1">
-                <a:solidFill>
-                  <a:srgbClr val="FFFFFF"/>
+              <a:rPr sz="1125" b="1">
+                <a:solidFill>
+                  <a:srgbClr val="2C6E73"/>
                 </a:solidFill>
                 <a:latin typeface="Arial"/>
                 <a:ea typeface="Arial"/>
@@ -8642,19 +8648,19 @@
           <p:cNvPr id="19" name="">
             <a:extLst xmlns:a="http://schemas.openxmlformats.org/drawingml/2006/main">
               <a:ext uri="{FF2B5EF4-FFF2-40B4-BE49-F238E27FC236}">
-                <a16:creationId xmlns:a16="http://schemas.microsoft.com/office/drawing/2014/main" id="{2CCC254F-79E5-473E-84AE-56F0BFB7D1CE}"/>
-              </a:ext>
-            </a:extLst>
-          </p:cNvPr>
-          <p:cNvSpPr>
-            <a:spLocks xmlns:a="http://schemas.openxmlformats.org/drawingml/2006/main" noGrp="1"/>
-          </p:cNvSpPr>
-          <p:nvPr/>
-        </p:nvSpPr>
-        <p:spPr>
-          <a:xfrm xmlns:a="http://schemas.openxmlformats.org/drawingml/2006/main">
-            <a:off x="1714500" y="3667125"/>
-            <a:ext cx="9429750" cy="609600"/>
+                <a16:creationId xmlns:a16="http://schemas.microsoft.com/office/drawing/2014/main" id="{A28749F7-A9C7-4939-9209-827FBCB15E8E}"/>
+              </a:ext>
+            </a:extLst>
+          </p:cNvPr>
+          <p:cNvSpPr>
+            <a:spLocks xmlns:a="http://schemas.openxmlformats.org/drawingml/2006/main" noGrp="1"/>
+          </p:cNvSpPr>
+          <p:nvPr/>
+        </p:nvSpPr>
+        <p:spPr>
+          <a:xfrm xmlns:a="http://schemas.openxmlformats.org/drawingml/2006/main">
+            <a:off x="1714500" y="3867150"/>
+            <a:ext cx="9525000" cy="809625"/>
           </a:xfrm>
           <a:prstGeom xmlns:a="http://schemas.openxmlformats.org/drawingml/2006/main" prst="rect">
             <a:avLst/>
@@ -8671,7 +8677,7 @@
           <a:lstStyle xmlns:a="http://schemas.openxmlformats.org/drawingml/2006/main"/>
           <a:p xmlns:a="http://schemas.openxmlformats.org/drawingml/2006/main">
             <a:pPr algn="l">
-              <a:defRPr sz="1500" b="0">
+              <a:defRPr sz="1725" b="0">
                 <a:solidFill>
                   <a:srgbClr val="17253A"/>
                 </a:solidFill>
@@ -8681,7 +8687,7 @@
               </a:defRPr>
             </a:pPr>
             <a:r>
-              <a:rPr sz="1500" b="0">
+              <a:rPr sz="1725" b="0">
                 <a:solidFill>
                   <a:srgbClr val="17253A"/>
                 </a:solidFill>
@@ -8689,7 +8695,7 @@
                 <a:ea typeface="Arial"/>
                 <a:cs typeface="Arial"/>
               </a:rPr>
-              <a:t>Complete the calculation: Six million, four hundred and seven thousand, two hundred and fifteen.</a:t>
+              <a:t>6 million, 407 thousand, 215</a:t>
             </a:r>
           </a:p>
         </p:txBody>
@@ -8699,28 +8705,30 @@
           <p:cNvPr id="20" name="">
             <a:extLst xmlns:a="http://schemas.openxmlformats.org/drawingml/2006/main">
               <a:ext uri="{FF2B5EF4-FFF2-40B4-BE49-F238E27FC236}">
-                <a16:creationId xmlns:a16="http://schemas.microsoft.com/office/drawing/2014/main" id="{B0F7C072-1F46-4B48-B03D-10345E57426A}"/>
-              </a:ext>
-            </a:extLst>
-          </p:cNvPr>
-          <p:cNvSpPr>
-            <a:spLocks xmlns:a="http://schemas.openxmlformats.org/drawingml/2006/main" noGrp="1"/>
-          </p:cNvSpPr>
-          <p:nvPr/>
-        </p:nvSpPr>
-        <p:spPr>
-          <a:xfrm xmlns:a="http://schemas.openxmlformats.org/drawingml/2006/main">
-            <a:off x="1000125" y="4476750"/>
-            <a:ext cx="476250" cy="476250"/>
-          </a:xfrm>
-          <a:prstGeom xmlns:a="http://schemas.openxmlformats.org/drawingml/2006/main" prst="ellipse">
+                <a16:creationId xmlns:a16="http://schemas.microsoft.com/office/drawing/2014/main" id="{583BC77F-C6E8-48A4-9AD7-0B88065C4943}"/>
+              </a:ext>
+            </a:extLst>
+          </p:cNvPr>
+          <p:cNvSpPr>
+            <a:spLocks xmlns:a="http://schemas.openxmlformats.org/drawingml/2006/main" noGrp="1"/>
+          </p:cNvSpPr>
+          <p:nvPr/>
+        </p:nvSpPr>
+        <p:spPr>
+          <a:xfrm xmlns:a="http://schemas.openxmlformats.org/drawingml/2006/main">
+            <a:off x="1714500" y="4695825"/>
+            <a:ext cx="9334500" cy="9525"/>
+          </a:xfrm>
+          <a:prstGeom xmlns:a="http://schemas.openxmlformats.org/drawingml/2006/main" prst="rect">
             <a:avLst/>
           </a:prstGeom>
           <a:solidFill xmlns:a="http://schemas.openxmlformats.org/drawingml/2006/main">
-            <a:srgbClr val="2C6E73"/>
+            <a:srgbClr val="D9E0E6"/>
           </a:solidFill>
           <a:ln xmlns:a="http://schemas.openxmlformats.org/drawingml/2006/main" w="0">
-            <a:noFill/>
+            <a:solidFill>
+              <a:srgbClr val="D9E0E6"/>
+            </a:solidFill>
           </a:ln>
         </p:spPr>
       </p:sp>
@@ -8729,19 +8737,19 @@
           <p:cNvPr id="21" name="">
             <a:extLst xmlns:a="http://schemas.openxmlformats.org/drawingml/2006/main">
               <a:ext uri="{FF2B5EF4-FFF2-40B4-BE49-F238E27FC236}">
-                <a16:creationId xmlns:a16="http://schemas.microsoft.com/office/drawing/2014/main" id="{8F03A8D7-CE23-4558-BF79-763E6848EBED}"/>
-              </a:ext>
-            </a:extLst>
-          </p:cNvPr>
-          <p:cNvSpPr>
-            <a:spLocks xmlns:a="http://schemas.openxmlformats.org/drawingml/2006/main" noGrp="1"/>
-          </p:cNvSpPr>
-          <p:nvPr/>
-        </p:nvSpPr>
-        <p:spPr>
-          <a:xfrm xmlns:a="http://schemas.openxmlformats.org/drawingml/2006/main">
-            <a:off x="1000125" y="4505325"/>
-            <a:ext cx="476250" cy="419100"/>
+                <a16:creationId xmlns:a16="http://schemas.microsoft.com/office/drawing/2014/main" id="{44B8A79F-5C9A-4DB3-A8B6-C5A8AC31DCF7}"/>
+              </a:ext>
+            </a:extLst>
+          </p:cNvPr>
+          <p:cNvSpPr>
+            <a:spLocks xmlns:a="http://schemas.openxmlformats.org/drawingml/2006/main" noGrp="1"/>
+          </p:cNvSpPr>
+          <p:nvPr/>
+        </p:nvSpPr>
+        <p:spPr>
+          <a:xfrm xmlns:a="http://schemas.openxmlformats.org/drawingml/2006/main">
+            <a:off x="1162050" y="4829175"/>
+            <a:ext cx="400050" cy="400050"/>
           </a:xfrm>
           <a:prstGeom xmlns:a="http://schemas.openxmlformats.org/drawingml/2006/main" prst="rect">
             <a:avLst/>
@@ -8758,9 +8766,9 @@
           <a:lstStyle xmlns:a="http://schemas.openxmlformats.org/drawingml/2006/main"/>
           <a:p xmlns:a="http://schemas.openxmlformats.org/drawingml/2006/main">
             <a:pPr algn="ctr">
-              <a:defRPr sz="1350" b="1">
-                <a:solidFill>
-                  <a:srgbClr val="FFFFFF"/>
+              <a:defRPr sz="1125" b="1">
+                <a:solidFill>
+                  <a:srgbClr val="2F785D"/>
                 </a:solidFill>
                 <a:latin typeface="Arial"/>
                 <a:ea typeface="Arial"/>
@@ -8768,9 +8776,9 @@
               </a:defRPr>
             </a:pPr>
             <a:r>
-              <a:rPr sz="1350" b="1">
-                <a:solidFill>
-                  <a:srgbClr val="FFFFFF"/>
+              <a:rPr sz="1125" b="1">
+                <a:solidFill>
+                  <a:srgbClr val="2F785D"/>
                 </a:solidFill>
                 <a:latin typeface="Arial"/>
                 <a:ea typeface="Arial"/>
@@ -8786,19 +8794,19 @@
           <p:cNvPr id="22" name="">
             <a:extLst xmlns:a="http://schemas.openxmlformats.org/drawingml/2006/main">
               <a:ext uri="{FF2B5EF4-FFF2-40B4-BE49-F238E27FC236}">
-                <a16:creationId xmlns:a16="http://schemas.microsoft.com/office/drawing/2014/main" id="{C5C6E59F-81AF-4DCD-B36C-CC0AB85DB52D}"/>
-              </a:ext>
-            </a:extLst>
-          </p:cNvPr>
-          <p:cNvSpPr>
-            <a:spLocks xmlns:a="http://schemas.openxmlformats.org/drawingml/2006/main" noGrp="1"/>
-          </p:cNvSpPr>
-          <p:nvPr/>
-        </p:nvSpPr>
-        <p:spPr>
-          <a:xfrm xmlns:a="http://schemas.openxmlformats.org/drawingml/2006/main">
-            <a:off x="1714500" y="4410075"/>
-            <a:ext cx="9429750" cy="609600"/>
+                <a16:creationId xmlns:a16="http://schemas.microsoft.com/office/drawing/2014/main" id="{D4C2CC59-B1FA-4068-99C4-8CF2BED8DE7A}"/>
+              </a:ext>
+            </a:extLst>
+          </p:cNvPr>
+          <p:cNvSpPr>
+            <a:spLocks xmlns:a="http://schemas.openxmlformats.org/drawingml/2006/main" noGrp="1"/>
+          </p:cNvSpPr>
+          <p:nvPr/>
+        </p:nvSpPr>
+        <p:spPr>
+          <a:xfrm xmlns:a="http://schemas.openxmlformats.org/drawingml/2006/main">
+            <a:off x="1714500" y="4743450"/>
+            <a:ext cx="9525000" cy="809625"/>
           </a:xfrm>
           <a:prstGeom xmlns:a="http://schemas.openxmlformats.org/drawingml/2006/main" prst="rect">
             <a:avLst/>
@@ -8815,7 +8823,7 @@
           <a:lstStyle xmlns:a="http://schemas.openxmlformats.org/drawingml/2006/main"/>
           <a:p xmlns:a="http://schemas.openxmlformats.org/drawingml/2006/main">
             <a:pPr algn="l">
-              <a:defRPr sz="1500" b="1">
+              <a:defRPr sz="1725" b="1">
                 <a:solidFill>
                   <a:srgbClr val="2F785D"/>
                 </a:solidFill>
@@ -8825,7 +8833,7 @@
               </a:defRPr>
             </a:pPr>
             <a:r>
-              <a:rPr sz="1500" b="1">
+              <a:rPr sz="1725" b="1">
                 <a:solidFill>
                   <a:srgbClr val="2F785D"/>
                 </a:solidFill>
@@ -8833,7 +8841,7 @@
                 <a:ea typeface="Arial"/>
                 <a:cs typeface="Arial"/>
               </a:rPr>
-              <a:t>Check the result: Check the value of every zero and compare from the greatest place.</a:t>
+              <a:t>Six million, four hundred and seven thousand, two hundred and fifteen</a:t>
             </a:r>
           </a:p>
         </p:txBody>
@@ -8841,7 +8849,7 @@
     </p:spTree>
     <p:extLst>
       <p:ext uri="{BB962C8B-B14F-4D97-AF65-F5344CB8AC3E}">
-        <p14:creationId xmlns:p14="http://schemas.microsoft.com/office/powerpoint/2010/main" val="1124373032"/>
+        <p14:creationId xmlns:p14="http://schemas.microsoft.com/office/powerpoint/2010/main" val="1023494935"/>
       </p:ext>
     </p:extLst>
   </p:cSld>
@@ -9134,7 +9142,7 @@
           <p:cNvPr id="15" name="">
             <a:extLst xmlns:a="http://schemas.openxmlformats.org/drawingml/2006/main">
               <a:ext uri="{FF2B5EF4-FFF2-40B4-BE49-F238E27FC236}">
-                <a16:creationId xmlns:a16="http://schemas.microsoft.com/office/drawing/2014/main" id="{C7C94FCC-F30B-4996-8F7D-4A90C9096EA2}"/>
+                <a16:creationId xmlns:a16="http://schemas.microsoft.com/office/drawing/2014/main" id="{BB3370E5-5B07-4EF4-A660-2B635E457DFB}"/>
               </a:ext>
             </a:extLst>
           </p:cNvPr>
@@ -9166,7 +9174,7 @@
           <p:cNvPr id="2" name="">
             <a:extLst xmlns:a="http://schemas.openxmlformats.org/drawingml/2006/main">
               <a:ext uri="{FF2B5EF4-FFF2-40B4-BE49-F238E27FC236}">
-                <a16:creationId xmlns:a16="http://schemas.microsoft.com/office/drawing/2014/main" id="{AC42980F-9D8E-42E3-9382-C33CDFAC4E68}"/>
+                <a16:creationId xmlns:a16="http://schemas.microsoft.com/office/drawing/2014/main" id="{C5EFAE43-1208-4CE5-B35F-DEC50BD7E643}"/>
               </a:ext>
             </a:extLst>
           </p:cNvPr>
@@ -9223,7 +9231,7 @@
           <p:cNvPr id="3" name="">
             <a:extLst xmlns:a="http://schemas.openxmlformats.org/drawingml/2006/main">
               <a:ext uri="{FF2B5EF4-FFF2-40B4-BE49-F238E27FC236}">
-                <a16:creationId xmlns:a16="http://schemas.microsoft.com/office/drawing/2014/main" id="{5F2885C3-CCCD-4022-ABBE-4B1121835E9B}"/>
+                <a16:creationId xmlns:a16="http://schemas.microsoft.com/office/drawing/2014/main" id="{6EF35572-7264-4B89-BC61-CCE530E9C595}"/>
               </a:ext>
             </a:extLst>
           </p:cNvPr>
@@ -9255,7 +9263,7 @@
           <p:cNvPr id="4" name="">
             <a:extLst xmlns:a="http://schemas.openxmlformats.org/drawingml/2006/main">
               <a:ext uri="{FF2B5EF4-FFF2-40B4-BE49-F238E27FC236}">
-                <a16:creationId xmlns:a16="http://schemas.microsoft.com/office/drawing/2014/main" id="{038F348A-88CB-47EF-A580-090DE85FC340}"/>
+                <a16:creationId xmlns:a16="http://schemas.microsoft.com/office/drawing/2014/main" id="{118CB0BF-2879-41B9-879F-4786FFAAB59A}"/>
               </a:ext>
             </a:extLst>
           </p:cNvPr>
@@ -9312,7 +9320,7 @@
           <p:cNvPr id="5" name="">
             <a:extLst xmlns:a="http://schemas.openxmlformats.org/drawingml/2006/main">
               <a:ext uri="{FF2B5EF4-FFF2-40B4-BE49-F238E27FC236}">
-                <a16:creationId xmlns:a16="http://schemas.microsoft.com/office/drawing/2014/main" id="{89F972C6-8679-4597-A9D4-3BABF044B30B}"/>
+                <a16:creationId xmlns:a16="http://schemas.microsoft.com/office/drawing/2014/main" id="{30662F16-8282-4CC5-B105-90FA02E8B76B}"/>
               </a:ext>
             </a:extLst>
           </p:cNvPr>
@@ -9369,7 +9377,7 @@
           <p:cNvPr id="6" name="">
             <a:extLst xmlns:a="http://schemas.openxmlformats.org/drawingml/2006/main">
               <a:ext uri="{FF2B5EF4-FFF2-40B4-BE49-F238E27FC236}">
-                <a16:creationId xmlns:a16="http://schemas.microsoft.com/office/drawing/2014/main" id="{ECD5272C-2A7D-4235-BE87-F735917E5BBE}"/>
+                <a16:creationId xmlns:a16="http://schemas.microsoft.com/office/drawing/2014/main" id="{0BB69188-A597-4420-A58C-C19B14F04853}"/>
               </a:ext>
             </a:extLst>
           </p:cNvPr>
@@ -9426,7 +9434,7 @@
           <p:cNvPr id="7" name="">
             <a:extLst xmlns:a="http://schemas.openxmlformats.org/drawingml/2006/main">
               <a:ext uri="{FF2B5EF4-FFF2-40B4-BE49-F238E27FC236}">
-                <a16:creationId xmlns:a16="http://schemas.microsoft.com/office/drawing/2014/main" id="{7AE21BA3-3C6C-4511-A2B0-9D48B6340F1B}"/>
+                <a16:creationId xmlns:a16="http://schemas.microsoft.com/office/drawing/2014/main" id="{FFF8B526-90A4-463C-A16E-3EF00E55A169}"/>
               </a:ext>
             </a:extLst>
           </p:cNvPr>
@@ -9458,7 +9466,7 @@
           <p:cNvPr id="8" name="">
             <a:extLst xmlns:a="http://schemas.openxmlformats.org/drawingml/2006/main">
               <a:ext uri="{FF2B5EF4-FFF2-40B4-BE49-F238E27FC236}">
-                <a16:creationId xmlns:a16="http://schemas.microsoft.com/office/drawing/2014/main" id="{F9C38048-2CF2-481B-BEBA-A62FC76E220F}"/>
+                <a16:creationId xmlns:a16="http://schemas.microsoft.com/office/drawing/2014/main" id="{FF058C3F-C205-4D71-96DA-5D0623688053}"/>
               </a:ext>
             </a:extLst>
           </p:cNvPr>
@@ -9515,7 +9523,7 @@
           <p:cNvPr id="9" name="">
             <a:extLst xmlns:a="http://schemas.openxmlformats.org/drawingml/2006/main">
               <a:ext uri="{FF2B5EF4-FFF2-40B4-BE49-F238E27FC236}">
-                <a16:creationId xmlns:a16="http://schemas.microsoft.com/office/drawing/2014/main" id="{648E4A10-FA43-4BD7-B62E-93DF4F96EA6B}"/>
+                <a16:creationId xmlns:a16="http://schemas.microsoft.com/office/drawing/2014/main" id="{06A9EB34-8CD8-407B-8892-B3CE47156BE5}"/>
               </a:ext>
             </a:extLst>
           </p:cNvPr>
@@ -9572,7 +9580,7 @@
           <p:cNvPr id="10" name="">
             <a:extLst xmlns:a="http://schemas.openxmlformats.org/drawingml/2006/main">
               <a:ext uri="{FF2B5EF4-FFF2-40B4-BE49-F238E27FC236}">
-                <a16:creationId xmlns:a16="http://schemas.microsoft.com/office/drawing/2014/main" id="{8BBCE346-8E6E-4494-94DC-704EE2700414}"/>
+                <a16:creationId xmlns:a16="http://schemas.microsoft.com/office/drawing/2014/main" id="{664F3149-FD2D-4DD0-9C05-032344D1D201}"/>
               </a:ext>
             </a:extLst>
           </p:cNvPr>
@@ -9629,7 +9637,7 @@
           <p:cNvPr id="11" name="">
             <a:extLst xmlns:a="http://schemas.openxmlformats.org/drawingml/2006/main">
               <a:ext uri="{FF2B5EF4-FFF2-40B4-BE49-F238E27FC236}">
-                <a16:creationId xmlns:a16="http://schemas.microsoft.com/office/drawing/2014/main" id="{7ECBC636-1946-428D-BFE1-FA311FA3BC4D}"/>
+                <a16:creationId xmlns:a16="http://schemas.microsoft.com/office/drawing/2014/main" id="{7FB92B64-2761-499E-9B84-FAEC1885656F}"/>
               </a:ext>
             </a:extLst>
           </p:cNvPr>
@@ -9686,7 +9694,7 @@
           <p:cNvPr id="12" name="">
             <a:extLst xmlns:a="http://schemas.openxmlformats.org/drawingml/2006/main">
               <a:ext uri="{FF2B5EF4-FFF2-40B4-BE49-F238E27FC236}">
-                <a16:creationId xmlns:a16="http://schemas.microsoft.com/office/drawing/2014/main" id="{4F04C35D-3F79-4FD7-A9C4-A7CEF4DB10B4}"/>
+                <a16:creationId xmlns:a16="http://schemas.microsoft.com/office/drawing/2014/main" id="{1B0E66EF-44DC-490A-9533-1AA138910E93}"/>
               </a:ext>
             </a:extLst>
           </p:cNvPr>
@@ -9718,7 +9726,7 @@
           <p:cNvPr id="13" name="">
             <a:extLst xmlns:a="http://schemas.openxmlformats.org/drawingml/2006/main">
               <a:ext uri="{FF2B5EF4-FFF2-40B4-BE49-F238E27FC236}">
-                <a16:creationId xmlns:a16="http://schemas.microsoft.com/office/drawing/2014/main" id="{E35677D6-D56E-4922-98CD-12451C9F874E}"/>
+                <a16:creationId xmlns:a16="http://schemas.microsoft.com/office/drawing/2014/main" id="{7D04AA51-4868-46B8-97A2-A35AC9141418}"/>
               </a:ext>
             </a:extLst>
           </p:cNvPr>
@@ -9775,7 +9783,7 @@
           <p:cNvPr id="14" name="">
             <a:extLst xmlns:a="http://schemas.openxmlformats.org/drawingml/2006/main">
               <a:ext uri="{FF2B5EF4-FFF2-40B4-BE49-F238E27FC236}">
-                <a16:creationId xmlns:a16="http://schemas.microsoft.com/office/drawing/2014/main" id="{75D089D2-D5F8-4D0E-9AB6-3C5CEE7F7515}"/>
+                <a16:creationId xmlns:a16="http://schemas.microsoft.com/office/drawing/2014/main" id="{2F38DD31-18EF-40DE-8A5F-39FBD001A76A}"/>
               </a:ext>
             </a:extLst>
           </p:cNvPr>
@@ -9830,7 +9838,7 @@
     </p:spTree>
     <p:extLst>
       <p:ext uri="{BB962C8B-B14F-4D97-AF65-F5344CB8AC3E}">
-        <p14:creationId xmlns:p14="http://schemas.microsoft.com/office/powerpoint/2010/main" val="865858748"/>
+        <p14:creationId xmlns:p14="http://schemas.microsoft.com/office/powerpoint/2010/main" val="779319992"/>
       </p:ext>
     </p:extLst>
   </p:cSld>
@@ -10031,7 +10039,7 @@
           <p:cNvPr id="16" name="">
             <a:extLst xmlns:a="http://schemas.openxmlformats.org/drawingml/2006/main">
               <a:ext uri="{FF2B5EF4-FFF2-40B4-BE49-F238E27FC236}">
-                <a16:creationId xmlns:a16="http://schemas.microsoft.com/office/drawing/2014/main" id="{5A992001-9E53-460C-97BC-6F1E07E046E9}"/>
+                <a16:creationId xmlns:a16="http://schemas.microsoft.com/office/drawing/2014/main" id="{EA69ACE7-CF81-4126-883F-4ABC909D6404}"/>
               </a:ext>
             </a:extLst>
           </p:cNvPr>
@@ -10063,7 +10071,7 @@
           <p:cNvPr id="2" name="">
             <a:extLst xmlns:a="http://schemas.openxmlformats.org/drawingml/2006/main">
               <a:ext uri="{FF2B5EF4-FFF2-40B4-BE49-F238E27FC236}">
-                <a16:creationId xmlns:a16="http://schemas.microsoft.com/office/drawing/2014/main" id="{60E2D0A9-4B49-41E5-97D4-FD162F93ED2E}"/>
+                <a16:creationId xmlns:a16="http://schemas.microsoft.com/office/drawing/2014/main" id="{90EA5496-6A86-4D8A-81FE-91E9D41760D9}"/>
               </a:ext>
             </a:extLst>
           </p:cNvPr>
@@ -10120,7 +10128,7 @@
           <p:cNvPr id="3" name="">
             <a:extLst xmlns:a="http://schemas.openxmlformats.org/drawingml/2006/main">
               <a:ext uri="{FF2B5EF4-FFF2-40B4-BE49-F238E27FC236}">
-                <a16:creationId xmlns:a16="http://schemas.microsoft.com/office/drawing/2014/main" id="{C6A00B59-F912-4FE0-BFEE-796A34BFA2A6}"/>
+                <a16:creationId xmlns:a16="http://schemas.microsoft.com/office/drawing/2014/main" id="{1B9926B3-BE68-4429-81C6-26D08B9E412B}"/>
               </a:ext>
             </a:extLst>
           </p:cNvPr>
@@ -10152,7 +10160,7 @@
           <p:cNvPr id="4" name="">
             <a:extLst xmlns:a="http://schemas.openxmlformats.org/drawingml/2006/main">
               <a:ext uri="{FF2B5EF4-FFF2-40B4-BE49-F238E27FC236}">
-                <a16:creationId xmlns:a16="http://schemas.microsoft.com/office/drawing/2014/main" id="{355AEA9F-7099-4E5F-9654-B5F03EA686E2}"/>
+                <a16:creationId xmlns:a16="http://schemas.microsoft.com/office/drawing/2014/main" id="{E629A259-3804-41E7-B16C-85A78AD51930}"/>
               </a:ext>
             </a:extLst>
           </p:cNvPr>
@@ -10209,7 +10217,7 @@
           <p:cNvPr id="5" name="">
             <a:extLst xmlns:a="http://schemas.openxmlformats.org/drawingml/2006/main">
               <a:ext uri="{FF2B5EF4-FFF2-40B4-BE49-F238E27FC236}">
-                <a16:creationId xmlns:a16="http://schemas.microsoft.com/office/drawing/2014/main" id="{B8442653-EA5D-44C3-99D2-E7BD993E292F}"/>
+                <a16:creationId xmlns:a16="http://schemas.microsoft.com/office/drawing/2014/main" id="{A30D205F-043E-4A5D-A74E-24214C2AFA21}"/>
               </a:ext>
             </a:extLst>
           </p:cNvPr>
@@ -10266,7 +10274,7 @@
           <p:cNvPr id="6" name="">
             <a:extLst xmlns:a="http://schemas.openxmlformats.org/drawingml/2006/main">
               <a:ext uri="{FF2B5EF4-FFF2-40B4-BE49-F238E27FC236}">
-                <a16:creationId xmlns:a16="http://schemas.microsoft.com/office/drawing/2014/main" id="{B854BB93-569C-4C1A-AA96-05A0D1BAF63E}"/>
+                <a16:creationId xmlns:a16="http://schemas.microsoft.com/office/drawing/2014/main" id="{575E3F2A-2A14-45BA-B952-28D874D5A029}"/>
               </a:ext>
             </a:extLst>
           </p:cNvPr>
@@ -10323,7 +10331,7 @@
           <p:cNvPr id="7" name="">
             <a:extLst xmlns:a="http://schemas.openxmlformats.org/drawingml/2006/main">
               <a:ext uri="{FF2B5EF4-FFF2-40B4-BE49-F238E27FC236}">
-                <a16:creationId xmlns:a16="http://schemas.microsoft.com/office/drawing/2014/main" id="{F05C10F8-B089-4666-A865-2546916E2522}"/>
+                <a16:creationId xmlns:a16="http://schemas.microsoft.com/office/drawing/2014/main" id="{86A3384A-AAA1-4191-AFEF-C4558716DBF1}"/>
               </a:ext>
             </a:extLst>
           </p:cNvPr>
@@ -10355,7 +10363,7 @@
           <p:cNvPr id="8" name="">
             <a:extLst xmlns:a="http://schemas.openxmlformats.org/drawingml/2006/main">
               <a:ext uri="{FF2B5EF4-FFF2-40B4-BE49-F238E27FC236}">
-                <a16:creationId xmlns:a16="http://schemas.microsoft.com/office/drawing/2014/main" id="{365DDDC6-61D3-498F-8F10-1B123152F6B6}"/>
+                <a16:creationId xmlns:a16="http://schemas.microsoft.com/office/drawing/2014/main" id="{16DD6EF3-106E-49FE-970C-E77A1D500605}"/>
               </a:ext>
             </a:extLst>
           </p:cNvPr>
@@ -10412,7 +10420,7 @@
           <p:cNvPr id="9" name="">
             <a:extLst xmlns:a="http://schemas.openxmlformats.org/drawingml/2006/main">
               <a:ext uri="{FF2B5EF4-FFF2-40B4-BE49-F238E27FC236}">
-                <a16:creationId xmlns:a16="http://schemas.microsoft.com/office/drawing/2014/main" id="{FD000EDC-6FCC-4D8B-8F37-445C00FE8736}"/>
+                <a16:creationId xmlns:a16="http://schemas.microsoft.com/office/drawing/2014/main" id="{F76A717D-4E62-4E09-8890-7D584030844A}"/>
               </a:ext>
             </a:extLst>
           </p:cNvPr>
@@ -10469,7 +10477,7 @@
           <p:cNvPr id="10" name="">
             <a:extLst xmlns:a="http://schemas.openxmlformats.org/drawingml/2006/main">
               <a:ext uri="{FF2B5EF4-FFF2-40B4-BE49-F238E27FC236}">
-                <a16:creationId xmlns:a16="http://schemas.microsoft.com/office/drawing/2014/main" id="{B463CB90-0C3C-48D2-A726-7E4DC7E16A35}"/>
+                <a16:creationId xmlns:a16="http://schemas.microsoft.com/office/drawing/2014/main" id="{5B26F98D-329B-4B15-9D8B-C0B9C3FC5F4A}"/>
               </a:ext>
             </a:extLst>
           </p:cNvPr>
@@ -10526,7 +10534,7 @@
           <p:cNvPr id="11" name="">
             <a:extLst xmlns:a="http://schemas.openxmlformats.org/drawingml/2006/main">
               <a:ext uri="{FF2B5EF4-FFF2-40B4-BE49-F238E27FC236}">
-                <a16:creationId xmlns:a16="http://schemas.microsoft.com/office/drawing/2014/main" id="{192CE541-5085-47BC-AF66-793FB8156713}"/>
+                <a16:creationId xmlns:a16="http://schemas.microsoft.com/office/drawing/2014/main" id="{8F916019-4050-4790-8F3E-8110F4512D85}"/>
               </a:ext>
             </a:extLst>
           </p:cNvPr>
@@ -10583,7 +10591,7 @@
           <p:cNvPr id="12" name="">
             <a:extLst xmlns:a="http://schemas.openxmlformats.org/drawingml/2006/main">
               <a:ext uri="{FF2B5EF4-FFF2-40B4-BE49-F238E27FC236}">
-                <a16:creationId xmlns:a16="http://schemas.microsoft.com/office/drawing/2014/main" id="{4E7C4581-21AD-44CF-85AD-A1DE1E7AEE9B}"/>
+                <a16:creationId xmlns:a16="http://schemas.microsoft.com/office/drawing/2014/main" id="{EFD832C3-E60F-425C-B1E7-8DB796E447DF}"/>
               </a:ext>
             </a:extLst>
           </p:cNvPr>
@@ -10640,7 +10648,7 @@
           <p:cNvPr id="13" name="">
             <a:extLst xmlns:a="http://schemas.openxmlformats.org/drawingml/2006/main">
               <a:ext uri="{FF2B5EF4-FFF2-40B4-BE49-F238E27FC236}">
-                <a16:creationId xmlns:a16="http://schemas.microsoft.com/office/drawing/2014/main" id="{300470CB-6B95-47CF-9E0B-FCBA51A54BC1}"/>
+                <a16:creationId xmlns:a16="http://schemas.microsoft.com/office/drawing/2014/main" id="{60690947-D04A-4CB6-A940-548263D2E947}"/>
               </a:ext>
             </a:extLst>
           </p:cNvPr>
@@ -10697,7 +10705,7 @@
           <p:cNvPr id="14" name="">
             <a:extLst xmlns:a="http://schemas.openxmlformats.org/drawingml/2006/main">
               <a:ext uri="{FF2B5EF4-FFF2-40B4-BE49-F238E27FC236}">
-                <a16:creationId xmlns:a16="http://schemas.microsoft.com/office/drawing/2014/main" id="{269624AE-FACC-436D-8247-D1A4981E6130}"/>
+                <a16:creationId xmlns:a16="http://schemas.microsoft.com/office/drawing/2014/main" id="{EC8EAF96-72CC-4D0E-BB20-9714BD061D86}"/>
               </a:ext>
             </a:extLst>
           </p:cNvPr>
@@ -10754,7 +10762,7 @@
           <p:cNvPr id="15" name="">
             <a:extLst xmlns:a="http://schemas.openxmlformats.org/drawingml/2006/main">
               <a:ext uri="{FF2B5EF4-FFF2-40B4-BE49-F238E27FC236}">
-                <a16:creationId xmlns:a16="http://schemas.microsoft.com/office/drawing/2014/main" id="{89F7C42B-6E94-4312-8CEA-A1D1386B4006}"/>
+                <a16:creationId xmlns:a16="http://schemas.microsoft.com/office/drawing/2014/main" id="{C9141C5B-089A-4E6D-AAE8-F404931A444C}"/>
               </a:ext>
             </a:extLst>
           </p:cNvPr>
@@ -10809,7 +10817,7 @@
     </p:spTree>
     <p:extLst>
       <p:ext uri="{BB962C8B-B14F-4D97-AF65-F5344CB8AC3E}">
-        <p14:creationId xmlns:p14="http://schemas.microsoft.com/office/powerpoint/2010/main" val="1539458646"/>
+        <p14:creationId xmlns:p14="http://schemas.microsoft.com/office/powerpoint/2010/main" val="1584496793"/>
       </p:ext>
     </p:extLst>
   </p:cSld>
@@ -10964,7 +10972,7 @@
           <p:cNvPr id="16" name="">
             <a:extLst xmlns:a="http://schemas.openxmlformats.org/drawingml/2006/main">
               <a:ext uri="{FF2B5EF4-FFF2-40B4-BE49-F238E27FC236}">
-                <a16:creationId xmlns:a16="http://schemas.microsoft.com/office/drawing/2014/main" id="{A15F30B4-BEC2-4360-A562-4745678378D4}"/>
+                <a16:creationId xmlns:a16="http://schemas.microsoft.com/office/drawing/2014/main" id="{5BC3AD51-CF6E-484A-BAA2-4485313F5DA8}"/>
               </a:ext>
             </a:extLst>
           </p:cNvPr>
@@ -10996,7 +11004,7 @@
           <p:cNvPr id="2" name="">
             <a:extLst xmlns:a="http://schemas.openxmlformats.org/drawingml/2006/main">
               <a:ext uri="{FF2B5EF4-FFF2-40B4-BE49-F238E27FC236}">
-                <a16:creationId xmlns:a16="http://schemas.microsoft.com/office/drawing/2014/main" id="{B4264DFA-2183-4CFE-AF83-8388744B7F7C}"/>
+                <a16:creationId xmlns:a16="http://schemas.microsoft.com/office/drawing/2014/main" id="{B9C71F2B-2123-4D91-8DCF-D7BEB15A4896}"/>
               </a:ext>
             </a:extLst>
           </p:cNvPr>
@@ -11053,7 +11061,7 @@
           <p:cNvPr id="3" name="">
             <a:extLst xmlns:a="http://schemas.openxmlformats.org/drawingml/2006/main">
               <a:ext uri="{FF2B5EF4-FFF2-40B4-BE49-F238E27FC236}">
-                <a16:creationId xmlns:a16="http://schemas.microsoft.com/office/drawing/2014/main" id="{AFD7F6B3-660C-4D6D-8D91-F238A713D613}"/>
+                <a16:creationId xmlns:a16="http://schemas.microsoft.com/office/drawing/2014/main" id="{84FD680D-6898-4622-8CBF-4C85E0280F93}"/>
               </a:ext>
             </a:extLst>
           </p:cNvPr>
@@ -11085,7 +11093,7 @@
           <p:cNvPr id="4" name="">
             <a:extLst xmlns:a="http://schemas.openxmlformats.org/drawingml/2006/main">
               <a:ext uri="{FF2B5EF4-FFF2-40B4-BE49-F238E27FC236}">
-                <a16:creationId xmlns:a16="http://schemas.microsoft.com/office/drawing/2014/main" id="{3A23671F-6F70-49FE-9CF0-EA5CEEA19B45}"/>
+                <a16:creationId xmlns:a16="http://schemas.microsoft.com/office/drawing/2014/main" id="{E79E7BE3-1D43-4D09-8E2C-61BEBB7314F6}"/>
               </a:ext>
             </a:extLst>
           </p:cNvPr>
@@ -11142,7 +11150,7 @@
           <p:cNvPr id="5" name="">
             <a:extLst xmlns:a="http://schemas.openxmlformats.org/drawingml/2006/main">
               <a:ext uri="{FF2B5EF4-FFF2-40B4-BE49-F238E27FC236}">
-                <a16:creationId xmlns:a16="http://schemas.microsoft.com/office/drawing/2014/main" id="{F00888C4-13D4-4790-8DDE-09C8752679EF}"/>
+                <a16:creationId xmlns:a16="http://schemas.microsoft.com/office/drawing/2014/main" id="{2938A16B-CB97-4D13-B7B9-70A5D1D56571}"/>
               </a:ext>
             </a:extLst>
           </p:cNvPr>
@@ -11199,7 +11207,7 @@
           <p:cNvPr id="6" name="">
             <a:extLst xmlns:a="http://schemas.openxmlformats.org/drawingml/2006/main">
               <a:ext uri="{FF2B5EF4-FFF2-40B4-BE49-F238E27FC236}">
-                <a16:creationId xmlns:a16="http://schemas.microsoft.com/office/drawing/2014/main" id="{901CDABD-2BE9-4BF6-8FE4-E978E46AE01E}"/>
+                <a16:creationId xmlns:a16="http://schemas.microsoft.com/office/drawing/2014/main" id="{4BF40782-67B8-4586-A418-013EE3305D24}"/>
               </a:ext>
             </a:extLst>
           </p:cNvPr>
@@ -11256,7 +11264,7 @@
           <p:cNvPr id="7" name="">
             <a:extLst xmlns:a="http://schemas.openxmlformats.org/drawingml/2006/main">
               <a:ext uri="{FF2B5EF4-FFF2-40B4-BE49-F238E27FC236}">
-                <a16:creationId xmlns:a16="http://schemas.microsoft.com/office/drawing/2014/main" id="{344F7BF6-B378-4DEB-81FB-D0BAE155EC64}"/>
+                <a16:creationId xmlns:a16="http://schemas.microsoft.com/office/drawing/2014/main" id="{E2C67B1E-9F91-4DBF-844C-4BCF831542BD}"/>
               </a:ext>
             </a:extLst>
           </p:cNvPr>
@@ -11288,7 +11296,7 @@
           <p:cNvPr id="8" name="">
             <a:extLst xmlns:a="http://schemas.openxmlformats.org/drawingml/2006/main">
               <a:ext uri="{FF2B5EF4-FFF2-40B4-BE49-F238E27FC236}">
-                <a16:creationId xmlns:a16="http://schemas.microsoft.com/office/drawing/2014/main" id="{5529FD3D-E4FE-44FC-A965-C2C172087372}"/>
+                <a16:creationId xmlns:a16="http://schemas.microsoft.com/office/drawing/2014/main" id="{2416D1A3-EDFE-4C14-98C7-5C5B2710FAC3}"/>
               </a:ext>
             </a:extLst>
           </p:cNvPr>
@@ -11345,7 +11353,7 @@
           <p:cNvPr id="9" name="">
             <a:extLst xmlns:a="http://schemas.openxmlformats.org/drawingml/2006/main">
               <a:ext uri="{FF2B5EF4-FFF2-40B4-BE49-F238E27FC236}">
-                <a16:creationId xmlns:a16="http://schemas.microsoft.com/office/drawing/2014/main" id="{E4452966-206B-441B-83DC-3E83E9DB8639}"/>
+                <a16:creationId xmlns:a16="http://schemas.microsoft.com/office/drawing/2014/main" id="{A88A0F60-964D-46A5-BD14-147CA772D4BF}"/>
               </a:ext>
             </a:extLst>
           </p:cNvPr>
@@ -11406,7 +11414,7 @@
           <p:nvPr/>
         </p:nvPicPr>
         <p:blipFill>
-          <a:blip xmlns:r="http://schemas.openxmlformats.org/officeDocument/2006/relationships" xmlns:a="http://schemas.openxmlformats.org/drawingml/2006/main" r:embed="R26b7641df2c54802"/>
+          <a:blip xmlns:r="http://schemas.openxmlformats.org/officeDocument/2006/relationships" xmlns:a="http://schemas.openxmlformats.org/drawingml/2006/main" r:embed="R074248dcc4154ea0"/>
           <a:stretch xmlns:a="http://schemas.openxmlformats.org/drawingml/2006/main"/>
         </p:blipFill>
         <p:spPr>
@@ -11424,7 +11432,7 @@
           <p:cNvPr id="11" name="">
             <a:extLst xmlns:a="http://schemas.openxmlformats.org/drawingml/2006/main">
               <a:ext uri="{FF2B5EF4-FFF2-40B4-BE49-F238E27FC236}">
-                <a16:creationId xmlns:a16="http://schemas.microsoft.com/office/drawing/2014/main" id="{9B0A4693-79DA-4C5D-9E91-041832EA45BB}"/>
+                <a16:creationId xmlns:a16="http://schemas.microsoft.com/office/drawing/2014/main" id="{0C435EFE-2689-45A9-90E8-BDAF35B14089}"/>
               </a:ext>
             </a:extLst>
           </p:cNvPr>
@@ -11481,7 +11489,7 @@
           <p:cNvPr id="12" name="">
             <a:extLst xmlns:a="http://schemas.openxmlformats.org/drawingml/2006/main">
               <a:ext uri="{FF2B5EF4-FFF2-40B4-BE49-F238E27FC236}">
-                <a16:creationId xmlns:a16="http://schemas.microsoft.com/office/drawing/2014/main" id="{CF8AEF97-ECB2-4025-9026-D8C2632A9440}"/>
+                <a16:creationId xmlns:a16="http://schemas.microsoft.com/office/drawing/2014/main" id="{C691DF65-E53A-4514-A21C-EBD116702BFC}"/>
               </a:ext>
             </a:extLst>
           </p:cNvPr>
@@ -11538,7 +11546,7 @@
           <p:cNvPr id="13" name="">
             <a:extLst xmlns:a="http://schemas.openxmlformats.org/drawingml/2006/main">
               <a:ext uri="{FF2B5EF4-FFF2-40B4-BE49-F238E27FC236}">
-                <a16:creationId xmlns:a16="http://schemas.microsoft.com/office/drawing/2014/main" id="{D72FE5B1-5F67-4DFB-9FD9-4F8667866DDB}"/>
+                <a16:creationId xmlns:a16="http://schemas.microsoft.com/office/drawing/2014/main" id="{3C1C10D4-D1A0-4455-BE31-567A6882A428}"/>
               </a:ext>
             </a:extLst>
           </p:cNvPr>
@@ -11570,7 +11578,7 @@
           <p:cNvPr id="14" name="">
             <a:extLst xmlns:a="http://schemas.openxmlformats.org/drawingml/2006/main">
               <a:ext uri="{FF2B5EF4-FFF2-40B4-BE49-F238E27FC236}">
-                <a16:creationId xmlns:a16="http://schemas.microsoft.com/office/drawing/2014/main" id="{32227DD2-012D-44CF-BE6E-1593B3B1602C}"/>
+                <a16:creationId xmlns:a16="http://schemas.microsoft.com/office/drawing/2014/main" id="{5D5114C3-6320-4D29-B8C2-28E0D780EDD4}"/>
               </a:ext>
             </a:extLst>
           </p:cNvPr>
@@ -11627,7 +11635,7 @@
           <p:cNvPr id="15" name="">
             <a:extLst xmlns:a="http://schemas.openxmlformats.org/drawingml/2006/main">
               <a:ext uri="{FF2B5EF4-FFF2-40B4-BE49-F238E27FC236}">
-                <a16:creationId xmlns:a16="http://schemas.microsoft.com/office/drawing/2014/main" id="{27B6C643-8FF7-4739-B3D7-DE05C6C5DC08}"/>
+                <a16:creationId xmlns:a16="http://schemas.microsoft.com/office/drawing/2014/main" id="{12D31F56-6529-454A-B749-F885BD479EB9}"/>
               </a:ext>
             </a:extLst>
           </p:cNvPr>
@@ -11682,7 +11690,7 @@
     </p:spTree>
     <p:extLst>
       <p:ext uri="{BB962C8B-B14F-4D97-AF65-F5344CB8AC3E}">
-        <p14:creationId xmlns:p14="http://schemas.microsoft.com/office/powerpoint/2010/main" val="1558244712"/>
+        <p14:creationId xmlns:p14="http://schemas.microsoft.com/office/powerpoint/2010/main" val="999358614"/>
       </p:ext>
     </p:extLst>
   </p:cSld>
@@ -11837,7 +11845,7 @@
           <p:cNvPr id="23" name="">
             <a:extLst xmlns:a="http://schemas.openxmlformats.org/drawingml/2006/main">
               <a:ext uri="{FF2B5EF4-FFF2-40B4-BE49-F238E27FC236}">
-                <a16:creationId xmlns:a16="http://schemas.microsoft.com/office/drawing/2014/main" id="{C279F8BF-E0B9-4FE9-A6ED-F94AD8699ABE}"/>
+                <a16:creationId xmlns:a16="http://schemas.microsoft.com/office/drawing/2014/main" id="{50E56D74-5DF4-46DC-B1CC-B7DA6595644B}"/>
               </a:ext>
             </a:extLst>
           </p:cNvPr>
@@ -11869,7 +11877,7 @@
           <p:cNvPr id="2" name="">
             <a:extLst xmlns:a="http://schemas.openxmlformats.org/drawingml/2006/main">
               <a:ext uri="{FF2B5EF4-FFF2-40B4-BE49-F238E27FC236}">
-                <a16:creationId xmlns:a16="http://schemas.microsoft.com/office/drawing/2014/main" id="{FF76BC18-C7E9-44A7-A9A0-7491EB2BD94C}"/>
+                <a16:creationId xmlns:a16="http://schemas.microsoft.com/office/drawing/2014/main" id="{7C1D79D3-5FE8-422D-A36E-C32E53AF35E7}"/>
               </a:ext>
             </a:extLst>
           </p:cNvPr>
@@ -11926,7 +11934,7 @@
           <p:cNvPr id="3" name="">
             <a:extLst xmlns:a="http://schemas.openxmlformats.org/drawingml/2006/main">
               <a:ext uri="{FF2B5EF4-FFF2-40B4-BE49-F238E27FC236}">
-                <a16:creationId xmlns:a16="http://schemas.microsoft.com/office/drawing/2014/main" id="{FB782654-74F8-41A4-9BC8-CA910D8D753D}"/>
+                <a16:creationId xmlns:a16="http://schemas.microsoft.com/office/drawing/2014/main" id="{571C7975-3A7F-47E7-861E-DC57A5618309}"/>
               </a:ext>
             </a:extLst>
           </p:cNvPr>
@@ -11958,7 +11966,7 @@
           <p:cNvPr id="4" name="">
             <a:extLst xmlns:a="http://schemas.openxmlformats.org/drawingml/2006/main">
               <a:ext uri="{FF2B5EF4-FFF2-40B4-BE49-F238E27FC236}">
-                <a16:creationId xmlns:a16="http://schemas.microsoft.com/office/drawing/2014/main" id="{78D4C1DD-9339-4569-8C23-7C7B19992007}"/>
+                <a16:creationId xmlns:a16="http://schemas.microsoft.com/office/drawing/2014/main" id="{C56B2582-DFFF-437D-9738-44F688E5ECFF}"/>
               </a:ext>
             </a:extLst>
           </p:cNvPr>
@@ -12015,7 +12023,7 @@
           <p:cNvPr id="5" name="">
             <a:extLst xmlns:a="http://schemas.openxmlformats.org/drawingml/2006/main">
               <a:ext uri="{FF2B5EF4-FFF2-40B4-BE49-F238E27FC236}">
-                <a16:creationId xmlns:a16="http://schemas.microsoft.com/office/drawing/2014/main" id="{927ED3F9-8C96-48C0-9D46-C8774A0534B3}"/>
+                <a16:creationId xmlns:a16="http://schemas.microsoft.com/office/drawing/2014/main" id="{724EB1AB-CB30-4A8D-9A73-0D073FC396B5}"/>
               </a:ext>
             </a:extLst>
           </p:cNvPr>
@@ -12072,7 +12080,7 @@
           <p:cNvPr id="6" name="">
             <a:extLst xmlns:a="http://schemas.openxmlformats.org/drawingml/2006/main">
               <a:ext uri="{FF2B5EF4-FFF2-40B4-BE49-F238E27FC236}">
-                <a16:creationId xmlns:a16="http://schemas.microsoft.com/office/drawing/2014/main" id="{261FCFE6-93A0-469A-A7A5-4ABFB491D4E5}"/>
+                <a16:creationId xmlns:a16="http://schemas.microsoft.com/office/drawing/2014/main" id="{5E712F45-65A9-4F49-9599-285E426DFFBD}"/>
               </a:ext>
             </a:extLst>
           </p:cNvPr>
@@ -12129,7 +12137,7 @@
           <p:cNvPr id="7" name="">
             <a:extLst xmlns:a="http://schemas.openxmlformats.org/drawingml/2006/main">
               <a:ext uri="{FF2B5EF4-FFF2-40B4-BE49-F238E27FC236}">
-                <a16:creationId xmlns:a16="http://schemas.microsoft.com/office/drawing/2014/main" id="{FB42CDD4-7E12-46E6-984B-FE4313096EA1}"/>
+                <a16:creationId xmlns:a16="http://schemas.microsoft.com/office/drawing/2014/main" id="{8951250B-2C4A-47CC-B4D4-82E4704E7584}"/>
               </a:ext>
             </a:extLst>
           </p:cNvPr>
@@ -12161,7 +12169,7 @@
           <p:cNvPr id="8" name="">
             <a:extLst xmlns:a="http://schemas.openxmlformats.org/drawingml/2006/main">
               <a:ext uri="{FF2B5EF4-FFF2-40B4-BE49-F238E27FC236}">
-                <a16:creationId xmlns:a16="http://schemas.microsoft.com/office/drawing/2014/main" id="{169415F5-B15D-485E-B1DA-5C3C6E3BCD73}"/>
+                <a16:creationId xmlns:a16="http://schemas.microsoft.com/office/drawing/2014/main" id="{BAABE4CE-F117-45CF-87F8-EC531E534AB8}"/>
               </a:ext>
             </a:extLst>
           </p:cNvPr>
@@ -12218,7 +12226,7 @@
           <p:cNvPr id="9" name="">
             <a:extLst xmlns:a="http://schemas.openxmlformats.org/drawingml/2006/main">
               <a:ext uri="{FF2B5EF4-FFF2-40B4-BE49-F238E27FC236}">
-                <a16:creationId xmlns:a16="http://schemas.microsoft.com/office/drawing/2014/main" id="{A23177FA-9C11-48A9-A398-44B89970EE67}"/>
+                <a16:creationId xmlns:a16="http://schemas.microsoft.com/office/drawing/2014/main" id="{A7B8AEF6-14B2-4826-A027-FA1411F39931}"/>
               </a:ext>
             </a:extLst>
           </p:cNvPr>
@@ -12275,7 +12283,7 @@
           <p:cNvPr id="10" name="">
             <a:extLst xmlns:a="http://schemas.openxmlformats.org/drawingml/2006/main">
               <a:ext uri="{FF2B5EF4-FFF2-40B4-BE49-F238E27FC236}">
-                <a16:creationId xmlns:a16="http://schemas.microsoft.com/office/drawing/2014/main" id="{7179ECEA-60DB-4761-A5AC-6DDD479A1A42}"/>
+                <a16:creationId xmlns:a16="http://schemas.microsoft.com/office/drawing/2014/main" id="{FC46DFB6-7C9B-4C02-A943-DFAD5BB8D49C}"/>
               </a:ext>
             </a:extLst>
           </p:cNvPr>
@@ -12309,7 +12317,7 @@
           <p:cNvPr id="11" name="">
             <a:extLst xmlns:a="http://schemas.openxmlformats.org/drawingml/2006/main">
               <a:ext uri="{FF2B5EF4-FFF2-40B4-BE49-F238E27FC236}">
-                <a16:creationId xmlns:a16="http://schemas.microsoft.com/office/drawing/2014/main" id="{4BAF7180-5BB8-4D35-8D26-042CD06302E4}"/>
+                <a16:creationId xmlns:a16="http://schemas.microsoft.com/office/drawing/2014/main" id="{1BB41F46-6D3D-4426-BA24-DBE5F1320276}"/>
               </a:ext>
             </a:extLst>
           </p:cNvPr>
@@ -12341,7 +12349,7 @@
           <p:cNvPr id="12" name="">
             <a:extLst xmlns:a="http://schemas.openxmlformats.org/drawingml/2006/main">
               <a:ext uri="{FF2B5EF4-FFF2-40B4-BE49-F238E27FC236}">
-                <a16:creationId xmlns:a16="http://schemas.microsoft.com/office/drawing/2014/main" id="{071CCADC-24D4-47CB-A361-F78ECA9FDE89}"/>
+                <a16:creationId xmlns:a16="http://schemas.microsoft.com/office/drawing/2014/main" id="{962F2A2F-8D2A-43B7-BDAD-B130A77C9871}"/>
               </a:ext>
             </a:extLst>
           </p:cNvPr>
@@ -12398,7 +12406,7 @@
           <p:cNvPr id="13" name="">
             <a:extLst xmlns:a="http://schemas.openxmlformats.org/drawingml/2006/main">
               <a:ext uri="{FF2B5EF4-FFF2-40B4-BE49-F238E27FC236}">
-                <a16:creationId xmlns:a16="http://schemas.microsoft.com/office/drawing/2014/main" id="{A73AF387-9586-4F25-ABF4-E1BAEF461F78}"/>
+                <a16:creationId xmlns:a16="http://schemas.microsoft.com/office/drawing/2014/main" id="{D402287C-2ACE-48B8-8CB5-9744A610E097}"/>
               </a:ext>
             </a:extLst>
           </p:cNvPr>
@@ -12455,7 +12463,7 @@
           <p:cNvPr id="14" name="">
             <a:extLst xmlns:a="http://schemas.openxmlformats.org/drawingml/2006/main">
               <a:ext uri="{FF2B5EF4-FFF2-40B4-BE49-F238E27FC236}">
-                <a16:creationId xmlns:a16="http://schemas.microsoft.com/office/drawing/2014/main" id="{6EB40DEE-4496-4F42-AAE9-AAACB5FDDFCE}"/>
+                <a16:creationId xmlns:a16="http://schemas.microsoft.com/office/drawing/2014/main" id="{946871C3-A629-496E-9019-42AB08EF6727}"/>
               </a:ext>
             </a:extLst>
           </p:cNvPr>
@@ -12489,7 +12497,7 @@
           <p:cNvPr id="15" name="">
             <a:extLst xmlns:a="http://schemas.openxmlformats.org/drawingml/2006/main">
               <a:ext uri="{FF2B5EF4-FFF2-40B4-BE49-F238E27FC236}">
-                <a16:creationId xmlns:a16="http://schemas.microsoft.com/office/drawing/2014/main" id="{02023A5B-8275-475F-AA86-4A39B4B0DBEC}"/>
+                <a16:creationId xmlns:a16="http://schemas.microsoft.com/office/drawing/2014/main" id="{7CF7A5EF-8D4D-4222-882C-1FEDD19F010B}"/>
               </a:ext>
             </a:extLst>
           </p:cNvPr>
@@ -12521,7 +12529,7 @@
           <p:cNvPr id="16" name="">
             <a:extLst xmlns:a="http://schemas.openxmlformats.org/drawingml/2006/main">
               <a:ext uri="{FF2B5EF4-FFF2-40B4-BE49-F238E27FC236}">
-                <a16:creationId xmlns:a16="http://schemas.microsoft.com/office/drawing/2014/main" id="{8B025E48-9CE8-43DA-93E0-0C4B3F3E8BF6}"/>
+                <a16:creationId xmlns:a16="http://schemas.microsoft.com/office/drawing/2014/main" id="{216DF62A-F86D-4027-9A2C-741B075BB7FF}"/>
               </a:ext>
             </a:extLst>
           </p:cNvPr>
@@ -12578,7 +12586,7 @@
           <p:cNvPr id="17" name="">
             <a:extLst xmlns:a="http://schemas.openxmlformats.org/drawingml/2006/main">
               <a:ext uri="{FF2B5EF4-FFF2-40B4-BE49-F238E27FC236}">
-                <a16:creationId xmlns:a16="http://schemas.microsoft.com/office/drawing/2014/main" id="{EB984005-4A35-4F62-8D80-66B39A4F1B22}"/>
+                <a16:creationId xmlns:a16="http://schemas.microsoft.com/office/drawing/2014/main" id="{50CBAB53-010A-42C4-83D4-B49293E8BBE1}"/>
               </a:ext>
             </a:extLst>
           </p:cNvPr>
@@ -12635,7 +12643,7 @@
           <p:cNvPr id="18" name="">
             <a:extLst xmlns:a="http://schemas.openxmlformats.org/drawingml/2006/main">
               <a:ext uri="{FF2B5EF4-FFF2-40B4-BE49-F238E27FC236}">
-                <a16:creationId xmlns:a16="http://schemas.microsoft.com/office/drawing/2014/main" id="{AE635674-C7B0-4B5C-9540-4C47DD799D5A}"/>
+                <a16:creationId xmlns:a16="http://schemas.microsoft.com/office/drawing/2014/main" id="{DC2DCE8B-24FB-4D8F-B5DB-BCC12AF0CA18}"/>
               </a:ext>
             </a:extLst>
           </p:cNvPr>
@@ -12669,7 +12677,7 @@
           <p:cNvPr id="19" name="">
             <a:extLst xmlns:a="http://schemas.openxmlformats.org/drawingml/2006/main">
               <a:ext uri="{FF2B5EF4-FFF2-40B4-BE49-F238E27FC236}">
-                <a16:creationId xmlns:a16="http://schemas.microsoft.com/office/drawing/2014/main" id="{41532D4A-0EDB-436D-B749-77A9E6A782EA}"/>
+                <a16:creationId xmlns:a16="http://schemas.microsoft.com/office/drawing/2014/main" id="{7461858F-0F3B-4C72-BF60-76036190D489}"/>
               </a:ext>
             </a:extLst>
           </p:cNvPr>
@@ -12701,7 +12709,7 @@
           <p:cNvPr id="20" name="">
             <a:extLst xmlns:a="http://schemas.openxmlformats.org/drawingml/2006/main">
               <a:ext uri="{FF2B5EF4-FFF2-40B4-BE49-F238E27FC236}">
-                <a16:creationId xmlns:a16="http://schemas.microsoft.com/office/drawing/2014/main" id="{8AB7E1D8-1DE1-4FDA-8023-43145741D1A1}"/>
+                <a16:creationId xmlns:a16="http://schemas.microsoft.com/office/drawing/2014/main" id="{D213584C-154A-443E-85D1-5592E914BB00}"/>
               </a:ext>
             </a:extLst>
           </p:cNvPr>
@@ -12758,7 +12766,7 @@
           <p:cNvPr id="21" name="">
             <a:extLst xmlns:a="http://schemas.openxmlformats.org/drawingml/2006/main">
               <a:ext uri="{FF2B5EF4-FFF2-40B4-BE49-F238E27FC236}">
-                <a16:creationId xmlns:a16="http://schemas.microsoft.com/office/drawing/2014/main" id="{82F94220-55CE-498C-BE89-134E226A4039}"/>
+                <a16:creationId xmlns:a16="http://schemas.microsoft.com/office/drawing/2014/main" id="{F3632B80-6AF0-43BC-93FC-4BC2B2C6C16C}"/>
               </a:ext>
             </a:extLst>
           </p:cNvPr>
@@ -12815,7 +12823,7 @@
           <p:cNvPr id="22" name="">
             <a:extLst xmlns:a="http://schemas.openxmlformats.org/drawingml/2006/main">
               <a:ext uri="{FF2B5EF4-FFF2-40B4-BE49-F238E27FC236}">
-                <a16:creationId xmlns:a16="http://schemas.microsoft.com/office/drawing/2014/main" id="{57E4742A-F0A4-4EB6-867E-88BCDFA543B1}"/>
+                <a16:creationId xmlns:a16="http://schemas.microsoft.com/office/drawing/2014/main" id="{5814D442-E371-4B1A-9418-7AB8E7A468D1}"/>
               </a:ext>
             </a:extLst>
           </p:cNvPr>
@@ -12870,7 +12878,7 @@
     </p:spTree>
     <p:extLst>
       <p:ext uri="{BB962C8B-B14F-4D97-AF65-F5344CB8AC3E}">
-        <p14:creationId xmlns:p14="http://schemas.microsoft.com/office/powerpoint/2010/main" val="629475397"/>
+        <p14:creationId xmlns:p14="http://schemas.microsoft.com/office/powerpoint/2010/main" val="1956492322"/>
       </p:ext>
     </p:extLst>
   </p:cSld>
@@ -13071,7 +13079,7 @@
           <p:cNvPr id="22" name="">
             <a:extLst xmlns:a="http://schemas.openxmlformats.org/drawingml/2006/main">
               <a:ext uri="{FF2B5EF4-FFF2-40B4-BE49-F238E27FC236}">
-                <a16:creationId xmlns:a16="http://schemas.microsoft.com/office/drawing/2014/main" id="{81D706F8-33DC-44D7-84DA-E41B9FBC2F5B}"/>
+                <a16:creationId xmlns:a16="http://schemas.microsoft.com/office/drawing/2014/main" id="{4FD9E45B-9219-4FD3-892E-64DB9031DEA6}"/>
               </a:ext>
             </a:extLst>
           </p:cNvPr>
@@ -13103,7 +13111,7 @@
           <p:cNvPr id="2" name="">
             <a:extLst xmlns:a="http://schemas.openxmlformats.org/drawingml/2006/main">
               <a:ext uri="{FF2B5EF4-FFF2-40B4-BE49-F238E27FC236}">
-                <a16:creationId xmlns:a16="http://schemas.microsoft.com/office/drawing/2014/main" id="{5D3A7BEA-EA17-46AB-9686-3C9D49C01BF5}"/>
+                <a16:creationId xmlns:a16="http://schemas.microsoft.com/office/drawing/2014/main" id="{90510F4E-8947-4723-82FC-A72DB81683A9}"/>
               </a:ext>
             </a:extLst>
           </p:cNvPr>
@@ -13160,7 +13168,7 @@
           <p:cNvPr id="3" name="">
             <a:extLst xmlns:a="http://schemas.openxmlformats.org/drawingml/2006/main">
               <a:ext uri="{FF2B5EF4-FFF2-40B4-BE49-F238E27FC236}">
-                <a16:creationId xmlns:a16="http://schemas.microsoft.com/office/drawing/2014/main" id="{4364A839-8EE3-4841-930F-1E863440E4F8}"/>
+                <a16:creationId xmlns:a16="http://schemas.microsoft.com/office/drawing/2014/main" id="{5943DD74-5586-44A6-9A49-468EE822E9A0}"/>
               </a:ext>
             </a:extLst>
           </p:cNvPr>
@@ -13192,7 +13200,7 @@
           <p:cNvPr id="4" name="">
             <a:extLst xmlns:a="http://schemas.openxmlformats.org/drawingml/2006/main">
               <a:ext uri="{FF2B5EF4-FFF2-40B4-BE49-F238E27FC236}">
-                <a16:creationId xmlns:a16="http://schemas.microsoft.com/office/drawing/2014/main" id="{E3F40E93-9164-4102-9355-2C8A45A883CC}"/>
+                <a16:creationId xmlns:a16="http://schemas.microsoft.com/office/drawing/2014/main" id="{D965D613-9F20-4BF1-967C-D347854874FE}"/>
               </a:ext>
             </a:extLst>
           </p:cNvPr>
@@ -13249,7 +13257,7 @@
           <p:cNvPr id="5" name="">
             <a:extLst xmlns:a="http://schemas.openxmlformats.org/drawingml/2006/main">
               <a:ext uri="{FF2B5EF4-FFF2-40B4-BE49-F238E27FC236}">
-                <a16:creationId xmlns:a16="http://schemas.microsoft.com/office/drawing/2014/main" id="{1ACC232A-A254-4369-B254-D1AC51A74BBC}"/>
+                <a16:creationId xmlns:a16="http://schemas.microsoft.com/office/drawing/2014/main" id="{ED0ACF98-A684-4684-9CC4-B04B9CAA8D7E}"/>
               </a:ext>
             </a:extLst>
           </p:cNvPr>
@@ -13306,7 +13314,7 @@
           <p:cNvPr id="6" name="">
             <a:extLst xmlns:a="http://schemas.openxmlformats.org/drawingml/2006/main">
               <a:ext uri="{FF2B5EF4-FFF2-40B4-BE49-F238E27FC236}">
-                <a16:creationId xmlns:a16="http://schemas.microsoft.com/office/drawing/2014/main" id="{BF43C5B0-5C49-47FD-88DA-9D834C317E72}"/>
+                <a16:creationId xmlns:a16="http://schemas.microsoft.com/office/drawing/2014/main" id="{7359560E-CD17-4639-A074-18321B8BBEAF}"/>
               </a:ext>
             </a:extLst>
           </p:cNvPr>
@@ -13363,7 +13371,7 @@
           <p:cNvPr id="7" name="">
             <a:extLst xmlns:a="http://schemas.openxmlformats.org/drawingml/2006/main">
               <a:ext uri="{FF2B5EF4-FFF2-40B4-BE49-F238E27FC236}">
-                <a16:creationId xmlns:a16="http://schemas.microsoft.com/office/drawing/2014/main" id="{4466E06E-86BC-41E9-A558-3EA6E8194D6F}"/>
+                <a16:creationId xmlns:a16="http://schemas.microsoft.com/office/drawing/2014/main" id="{C7F4B247-D556-486D-80D8-8304439CB43F}"/>
               </a:ext>
             </a:extLst>
           </p:cNvPr>
@@ -13395,7 +13403,7 @@
           <p:cNvPr id="8" name="">
             <a:extLst xmlns:a="http://schemas.openxmlformats.org/drawingml/2006/main">
               <a:ext uri="{FF2B5EF4-FFF2-40B4-BE49-F238E27FC236}">
-                <a16:creationId xmlns:a16="http://schemas.microsoft.com/office/drawing/2014/main" id="{65C44B92-2ED4-4232-8085-1A46B95C5F7D}"/>
+                <a16:creationId xmlns:a16="http://schemas.microsoft.com/office/drawing/2014/main" id="{54C4C3BF-3187-46B6-B742-92EC4306A67F}"/>
               </a:ext>
             </a:extLst>
           </p:cNvPr>
@@ -13452,7 +13460,7 @@
           <p:cNvPr id="9" name="">
             <a:extLst xmlns:a="http://schemas.openxmlformats.org/drawingml/2006/main">
               <a:ext uri="{FF2B5EF4-FFF2-40B4-BE49-F238E27FC236}">
-                <a16:creationId xmlns:a16="http://schemas.microsoft.com/office/drawing/2014/main" id="{546A5117-FBF1-4BF5-A204-9FF9077E89AD}"/>
+                <a16:creationId xmlns:a16="http://schemas.microsoft.com/office/drawing/2014/main" id="{79E13C35-2F1C-4A92-96CF-EA52D60A15A4}"/>
               </a:ext>
             </a:extLst>
           </p:cNvPr>
@@ -13509,7 +13517,7 @@
           <p:cNvPr id="10" name="">
             <a:extLst xmlns:a="http://schemas.openxmlformats.org/drawingml/2006/main">
               <a:ext uri="{FF2B5EF4-FFF2-40B4-BE49-F238E27FC236}">
-                <a16:creationId xmlns:a16="http://schemas.microsoft.com/office/drawing/2014/main" id="{AD0A7697-A554-4B07-A0E9-D52C745DC5E2}"/>
+                <a16:creationId xmlns:a16="http://schemas.microsoft.com/office/drawing/2014/main" id="{867D7081-0DD1-4D19-9E1B-2AFF42DC8ADC}"/>
               </a:ext>
             </a:extLst>
           </p:cNvPr>
@@ -13543,7 +13551,7 @@
           <p:cNvPr id="11" name="">
             <a:extLst xmlns:a="http://schemas.openxmlformats.org/drawingml/2006/main">
               <a:ext uri="{FF2B5EF4-FFF2-40B4-BE49-F238E27FC236}">
-                <a16:creationId xmlns:a16="http://schemas.microsoft.com/office/drawing/2014/main" id="{F9126A12-F5E1-4F97-85EF-F8CF60FA4BF0}"/>
+                <a16:creationId xmlns:a16="http://schemas.microsoft.com/office/drawing/2014/main" id="{1669A017-3570-45F1-9949-CCE03D31FE04}"/>
               </a:ext>
             </a:extLst>
           </p:cNvPr>
@@ -13575,7 +13583,7 @@
           <p:cNvPr id="12" name="">
             <a:extLst xmlns:a="http://schemas.openxmlformats.org/drawingml/2006/main">
               <a:ext uri="{FF2B5EF4-FFF2-40B4-BE49-F238E27FC236}">
-                <a16:creationId xmlns:a16="http://schemas.microsoft.com/office/drawing/2014/main" id="{7DCD0D8E-F928-4C20-B290-C7419698597E}"/>
+                <a16:creationId xmlns:a16="http://schemas.microsoft.com/office/drawing/2014/main" id="{724B1698-AC42-4FFA-8CF4-172A6292A378}"/>
               </a:ext>
             </a:extLst>
           </p:cNvPr>
@@ -13632,7 +13640,7 @@
           <p:cNvPr id="13" name="">
             <a:extLst xmlns:a="http://schemas.openxmlformats.org/drawingml/2006/main">
               <a:ext uri="{FF2B5EF4-FFF2-40B4-BE49-F238E27FC236}">
-                <a16:creationId xmlns:a16="http://schemas.microsoft.com/office/drawing/2014/main" id="{7E9DF05F-78D6-42E4-BECC-B59432B6ED63}"/>
+                <a16:creationId xmlns:a16="http://schemas.microsoft.com/office/drawing/2014/main" id="{AF71C20F-96CA-4B72-8767-D99DC1BEE7EE}"/>
               </a:ext>
             </a:extLst>
           </p:cNvPr>
@@ -13689,7 +13697,7 @@
           <p:cNvPr id="14" name="">
             <a:extLst xmlns:a="http://schemas.openxmlformats.org/drawingml/2006/main">
               <a:ext uri="{FF2B5EF4-FFF2-40B4-BE49-F238E27FC236}">
-                <a16:creationId xmlns:a16="http://schemas.microsoft.com/office/drawing/2014/main" id="{4EDBD83F-A6A7-440E-BB26-F8AF1A9028B1}"/>
+                <a16:creationId xmlns:a16="http://schemas.microsoft.com/office/drawing/2014/main" id="{B9887466-1C91-465B-A2AE-B19605B21A33}"/>
               </a:ext>
             </a:extLst>
           </p:cNvPr>
@@ -13723,7 +13731,7 @@
           <p:cNvPr id="15" name="">
             <a:extLst xmlns:a="http://schemas.openxmlformats.org/drawingml/2006/main">
               <a:ext uri="{FF2B5EF4-FFF2-40B4-BE49-F238E27FC236}">
-                <a16:creationId xmlns:a16="http://schemas.microsoft.com/office/drawing/2014/main" id="{A52873C1-C84B-4630-BAD3-DBBD9D6DEFC0}"/>
+                <a16:creationId xmlns:a16="http://schemas.microsoft.com/office/drawing/2014/main" id="{4E74910F-867C-431C-933C-1EAED9D77DC0}"/>
               </a:ext>
             </a:extLst>
           </p:cNvPr>
@@ -13755,7 +13763,7 @@
           <p:cNvPr id="16" name="">
             <a:extLst xmlns:a="http://schemas.openxmlformats.org/drawingml/2006/main">
               <a:ext uri="{FF2B5EF4-FFF2-40B4-BE49-F238E27FC236}">
-                <a16:creationId xmlns:a16="http://schemas.microsoft.com/office/drawing/2014/main" id="{A5D2F7C0-C4AD-4FF4-8B6C-50E28C4ED570}"/>
+                <a16:creationId xmlns:a16="http://schemas.microsoft.com/office/drawing/2014/main" id="{34F8A59C-DC20-4AA0-8AB0-0FDE5BDC9045}"/>
               </a:ext>
             </a:extLst>
           </p:cNvPr>
@@ -13812,7 +13820,7 @@
           <p:cNvPr id="17" name="">
             <a:extLst xmlns:a="http://schemas.openxmlformats.org/drawingml/2006/main">
               <a:ext uri="{FF2B5EF4-FFF2-40B4-BE49-F238E27FC236}">
-                <a16:creationId xmlns:a16="http://schemas.microsoft.com/office/drawing/2014/main" id="{F9A5F43E-B6FB-4FD1-A4A8-E680EBB095C9}"/>
+                <a16:creationId xmlns:a16="http://schemas.microsoft.com/office/drawing/2014/main" id="{8048CD82-EE5F-4007-A818-A1EB24FD6203}"/>
               </a:ext>
             </a:extLst>
           </p:cNvPr>
@@ -13869,7 +13877,7 @@
           <p:cNvPr id="18" name="">
             <a:extLst xmlns:a="http://schemas.openxmlformats.org/drawingml/2006/main">
               <a:ext uri="{FF2B5EF4-FFF2-40B4-BE49-F238E27FC236}">
-                <a16:creationId xmlns:a16="http://schemas.microsoft.com/office/drawing/2014/main" id="{A75809F9-DEA2-4777-B02D-AB23AB1E97DC}"/>
+                <a16:creationId xmlns:a16="http://schemas.microsoft.com/office/drawing/2014/main" id="{32953CDD-8B3B-42EF-96DE-520018F675FB}"/>
               </a:ext>
             </a:extLst>
           </p:cNvPr>
@@ -13903,7 +13911,7 @@
           <p:cNvPr id="19" name="">
             <a:extLst xmlns:a="http://schemas.openxmlformats.org/drawingml/2006/main">
               <a:ext uri="{FF2B5EF4-FFF2-40B4-BE49-F238E27FC236}">
-                <a16:creationId xmlns:a16="http://schemas.microsoft.com/office/drawing/2014/main" id="{F8573C71-0423-44F5-8F22-1944B2053EFD}"/>
+                <a16:creationId xmlns:a16="http://schemas.microsoft.com/office/drawing/2014/main" id="{901E87C9-AA9F-4069-BFA2-DCB65E7F9ACB}"/>
               </a:ext>
             </a:extLst>
           </p:cNvPr>
@@ -13935,7 +13943,7 @@
           <p:cNvPr id="20" name="">
             <a:extLst xmlns:a="http://schemas.openxmlformats.org/drawingml/2006/main">
               <a:ext uri="{FF2B5EF4-FFF2-40B4-BE49-F238E27FC236}">
-                <a16:creationId xmlns:a16="http://schemas.microsoft.com/office/drawing/2014/main" id="{D4623C39-BD8B-40F2-BDFD-9B2B2B7A9973}"/>
+                <a16:creationId xmlns:a16="http://schemas.microsoft.com/office/drawing/2014/main" id="{F203E4A9-BD47-471C-9370-94E721FD3542}"/>
               </a:ext>
             </a:extLst>
           </p:cNvPr>
@@ -13992,7 +14000,7 @@
           <p:cNvPr id="21" name="">
             <a:extLst xmlns:a="http://schemas.openxmlformats.org/drawingml/2006/main">
               <a:ext uri="{FF2B5EF4-FFF2-40B4-BE49-F238E27FC236}">
-                <a16:creationId xmlns:a16="http://schemas.microsoft.com/office/drawing/2014/main" id="{1392550C-2429-49ED-B1A1-D646D7EAFA7B}"/>
+                <a16:creationId xmlns:a16="http://schemas.microsoft.com/office/drawing/2014/main" id="{FC9064A4-AA59-41D6-8611-36C6AC0FC5D2}"/>
               </a:ext>
             </a:extLst>
           </p:cNvPr>
@@ -14047,7 +14055,7 @@
     </p:spTree>
     <p:extLst>
       <p:ext uri="{BB962C8B-B14F-4D97-AF65-F5344CB8AC3E}">
-        <p14:creationId xmlns:p14="http://schemas.microsoft.com/office/powerpoint/2010/main" val="1645737526"/>
+        <p14:creationId xmlns:p14="http://schemas.microsoft.com/office/powerpoint/2010/main" val="1965992563"/>
       </p:ext>
     </p:extLst>
   </p:cSld>
